--- a/PROPOSAL.pptx
+++ b/PROPOSAL.pptx
@@ -4,6 +4,9 @@
   <p:sldMasterIdLst>
     <p:sldMasterId id="2147483660" r:id="rId1"/>
   </p:sldMasterIdLst>
+  <p:notesMasterIdLst>
+    <p:notesMasterId r:id="rId15"/>
+  </p:notesMasterIdLst>
   <p:sldIdLst>
     <p:sldId id="256" r:id="rId2"/>
     <p:sldId id="258" r:id="rId3"/>
@@ -14,6 +17,10 @@
     <p:sldId id="261" r:id="rId8"/>
     <p:sldId id="262" r:id="rId9"/>
     <p:sldId id="264" r:id="rId10"/>
+    <p:sldId id="265" r:id="rId11"/>
+    <p:sldId id="266" r:id="rId12"/>
+    <p:sldId id="267" r:id="rId13"/>
+    <p:sldId id="268" r:id="rId14"/>
   </p:sldIdLst>
   <p:sldSz cx="12192000" cy="6858000"/>
   <p:notesSz cx="6858000" cy="9144000"/>
@@ -3607,6 +3614,2143 @@
 </dgm:styleDef>
 </file>
 
+<file path=ppt/notesMasters/notesMaster1.xml><?xml version="1.0" encoding="utf-8"?>
+<p:notesMaster xmlns:a="http://schemas.openxmlformats.org/drawingml/2006/main" xmlns:r="http://schemas.openxmlformats.org/officeDocument/2006/relationships" xmlns:p="http://schemas.openxmlformats.org/presentationml/2006/main">
+  <p:cSld>
+    <p:bg>
+      <p:bgRef idx="1001">
+        <a:schemeClr val="bg1"/>
+      </p:bgRef>
+    </p:bg>
+    <p:spTree>
+      <p:nvGrpSpPr>
+        <p:cNvPr id="1" name=""/>
+        <p:cNvGrpSpPr/>
+        <p:nvPr/>
+      </p:nvGrpSpPr>
+      <p:grpSpPr>
+        <a:xfrm>
+          <a:off x="0" y="0"/>
+          <a:ext cx="0" cy="0"/>
+          <a:chOff x="0" y="0"/>
+          <a:chExt cx="0" cy="0"/>
+        </a:xfrm>
+      </p:grpSpPr>
+      <p:sp>
+        <p:nvSpPr>
+          <p:cNvPr id="2" name="Header Placeholder 1"/>
+          <p:cNvSpPr>
+            <a:spLocks noGrp="1"/>
+          </p:cNvSpPr>
+          <p:nvPr>
+            <p:ph type="hdr" sz="quarter"/>
+          </p:nvPr>
+        </p:nvSpPr>
+        <p:spPr>
+          <a:xfrm>
+            <a:off x="0" y="0"/>
+            <a:ext cx="2971800" cy="458788"/>
+          </a:xfrm>
+          <a:prstGeom prst="rect">
+            <a:avLst/>
+          </a:prstGeom>
+        </p:spPr>
+        <p:txBody>
+          <a:bodyPr vert="horz" lIns="91440" tIns="45720" rIns="91440" bIns="45720" rtlCol="0"/>
+          <a:lstStyle>
+            <a:lvl1pPr algn="l">
+              <a:defRPr sz="1200"/>
+            </a:lvl1pPr>
+          </a:lstStyle>
+          <a:p>
+            <a:endParaRPr lang="tr-TR"/>
+          </a:p>
+        </p:txBody>
+      </p:sp>
+      <p:sp>
+        <p:nvSpPr>
+          <p:cNvPr id="3" name="Date Placeholder 2"/>
+          <p:cNvSpPr>
+            <a:spLocks noGrp="1"/>
+          </p:cNvSpPr>
+          <p:nvPr>
+            <p:ph type="dt" idx="1"/>
+          </p:nvPr>
+        </p:nvSpPr>
+        <p:spPr>
+          <a:xfrm>
+            <a:off x="3884613" y="0"/>
+            <a:ext cx="2971800" cy="458788"/>
+          </a:xfrm>
+          <a:prstGeom prst="rect">
+            <a:avLst/>
+          </a:prstGeom>
+        </p:spPr>
+        <p:txBody>
+          <a:bodyPr vert="horz" lIns="91440" tIns="45720" rIns="91440" bIns="45720" rtlCol="0"/>
+          <a:lstStyle>
+            <a:lvl1pPr algn="r">
+              <a:defRPr sz="1200"/>
+            </a:lvl1pPr>
+          </a:lstStyle>
+          <a:p>
+            <a:fld id="{B478EBD3-4CD3-4EF9-8435-18CA8AD1BBFB}" type="datetimeFigureOut">
+              <a:rPr lang="tr-TR" smtClean="0"/>
+              <a:t>26.03.2026</a:t>
+            </a:fld>
+            <a:endParaRPr lang="tr-TR"/>
+          </a:p>
+        </p:txBody>
+      </p:sp>
+      <p:sp>
+        <p:nvSpPr>
+          <p:cNvPr id="4" name="Slide Image Placeholder 3"/>
+          <p:cNvSpPr>
+            <a:spLocks noGrp="1" noRot="1" noChangeAspect="1"/>
+          </p:cNvSpPr>
+          <p:nvPr>
+            <p:ph type="sldImg" idx="2"/>
+          </p:nvPr>
+        </p:nvSpPr>
+        <p:spPr>
+          <a:xfrm>
+            <a:off x="685800" y="1143000"/>
+            <a:ext cx="5486400" cy="3086100"/>
+          </a:xfrm>
+          <a:prstGeom prst="rect">
+            <a:avLst/>
+          </a:prstGeom>
+          <a:noFill/>
+          <a:ln w="12700">
+            <a:solidFill>
+              <a:prstClr val="black"/>
+            </a:solidFill>
+          </a:ln>
+        </p:spPr>
+        <p:txBody>
+          <a:bodyPr vert="horz" lIns="91440" tIns="45720" rIns="91440" bIns="45720" rtlCol="0" anchor="ctr"/>
+          <a:lstStyle/>
+          <a:p>
+            <a:endParaRPr lang="tr-TR"/>
+          </a:p>
+        </p:txBody>
+      </p:sp>
+      <p:sp>
+        <p:nvSpPr>
+          <p:cNvPr id="5" name="Notes Placeholder 4"/>
+          <p:cNvSpPr>
+            <a:spLocks noGrp="1"/>
+          </p:cNvSpPr>
+          <p:nvPr>
+            <p:ph type="body" sz="quarter" idx="3"/>
+          </p:nvPr>
+        </p:nvSpPr>
+        <p:spPr>
+          <a:xfrm>
+            <a:off x="685800" y="4400550"/>
+            <a:ext cx="5486400" cy="3600450"/>
+          </a:xfrm>
+          <a:prstGeom prst="rect">
+            <a:avLst/>
+          </a:prstGeom>
+        </p:spPr>
+        <p:txBody>
+          <a:bodyPr vert="horz" lIns="91440" tIns="45720" rIns="91440" bIns="45720" rtlCol="0"/>
+          <a:lstStyle/>
+          <a:p>
+            <a:pPr lvl="0"/>
+            <a:r>
+              <a:rPr lang="en-US"/>
+              <a:t>Edit Master text styles</a:t>
+            </a:r>
+          </a:p>
+          <a:p>
+            <a:pPr lvl="1"/>
+            <a:r>
+              <a:rPr lang="en-US"/>
+              <a:t>Second level</a:t>
+            </a:r>
+          </a:p>
+          <a:p>
+            <a:pPr lvl="2"/>
+            <a:r>
+              <a:rPr lang="en-US"/>
+              <a:t>Third level</a:t>
+            </a:r>
+          </a:p>
+          <a:p>
+            <a:pPr lvl="3"/>
+            <a:r>
+              <a:rPr lang="en-US"/>
+              <a:t>Fourth level</a:t>
+            </a:r>
+          </a:p>
+          <a:p>
+            <a:pPr lvl="4"/>
+            <a:r>
+              <a:rPr lang="en-US"/>
+              <a:t>Fifth level</a:t>
+            </a:r>
+            <a:endParaRPr lang="tr-TR"/>
+          </a:p>
+        </p:txBody>
+      </p:sp>
+      <p:sp>
+        <p:nvSpPr>
+          <p:cNvPr id="6" name="Footer Placeholder 5"/>
+          <p:cNvSpPr>
+            <a:spLocks noGrp="1"/>
+          </p:cNvSpPr>
+          <p:nvPr>
+            <p:ph type="ftr" sz="quarter" idx="4"/>
+          </p:nvPr>
+        </p:nvSpPr>
+        <p:spPr>
+          <a:xfrm>
+            <a:off x="0" y="8685213"/>
+            <a:ext cx="2971800" cy="458787"/>
+          </a:xfrm>
+          <a:prstGeom prst="rect">
+            <a:avLst/>
+          </a:prstGeom>
+        </p:spPr>
+        <p:txBody>
+          <a:bodyPr vert="horz" lIns="91440" tIns="45720" rIns="91440" bIns="45720" rtlCol="0" anchor="b"/>
+          <a:lstStyle>
+            <a:lvl1pPr algn="l">
+              <a:defRPr sz="1200"/>
+            </a:lvl1pPr>
+          </a:lstStyle>
+          <a:p>
+            <a:endParaRPr lang="tr-TR"/>
+          </a:p>
+        </p:txBody>
+      </p:sp>
+      <p:sp>
+        <p:nvSpPr>
+          <p:cNvPr id="7" name="Slide Number Placeholder 6"/>
+          <p:cNvSpPr>
+            <a:spLocks noGrp="1"/>
+          </p:cNvSpPr>
+          <p:nvPr>
+            <p:ph type="sldNum" sz="quarter" idx="5"/>
+          </p:nvPr>
+        </p:nvSpPr>
+        <p:spPr>
+          <a:xfrm>
+            <a:off x="3884613" y="8685213"/>
+            <a:ext cx="2971800" cy="458787"/>
+          </a:xfrm>
+          <a:prstGeom prst="rect">
+            <a:avLst/>
+          </a:prstGeom>
+        </p:spPr>
+        <p:txBody>
+          <a:bodyPr vert="horz" lIns="91440" tIns="45720" rIns="91440" bIns="45720" rtlCol="0" anchor="b"/>
+          <a:lstStyle>
+            <a:lvl1pPr algn="r">
+              <a:defRPr sz="1200"/>
+            </a:lvl1pPr>
+          </a:lstStyle>
+          <a:p>
+            <a:fld id="{752C7C5B-4A3C-4977-AE81-15EA38719C52}" type="slidenum">
+              <a:rPr lang="tr-TR" smtClean="0"/>
+              <a:t>‹#›</a:t>
+            </a:fld>
+            <a:endParaRPr lang="tr-TR"/>
+          </a:p>
+        </p:txBody>
+      </p:sp>
+    </p:spTree>
+    <p:extLst>
+      <p:ext uri="{BB962C8B-B14F-4D97-AF65-F5344CB8AC3E}">
+        <p14:creationId xmlns:p14="http://schemas.microsoft.com/office/powerpoint/2010/main" val="670039536"/>
+      </p:ext>
+    </p:extLst>
+  </p:cSld>
+  <p:clrMap bg1="lt1" tx1="dk1" bg2="lt2" tx2="dk2" accent1="accent1" accent2="accent2" accent3="accent3" accent4="accent4" accent5="accent5" accent6="accent6" hlink="hlink" folHlink="folHlink"/>
+  <p:notesStyle>
+    <a:lvl1pPr marL="0" algn="l" defTabSz="914400" rtl="0" eaLnBrk="1" latinLnBrk="0" hangingPunct="1">
+      <a:defRPr sz="1200" kern="1200">
+        <a:solidFill>
+          <a:schemeClr val="tx1"/>
+        </a:solidFill>
+        <a:latin typeface="+mn-lt"/>
+        <a:ea typeface="+mn-ea"/>
+        <a:cs typeface="+mn-cs"/>
+      </a:defRPr>
+    </a:lvl1pPr>
+    <a:lvl2pPr marL="457200" algn="l" defTabSz="914400" rtl="0" eaLnBrk="1" latinLnBrk="0" hangingPunct="1">
+      <a:defRPr sz="1200" kern="1200">
+        <a:solidFill>
+          <a:schemeClr val="tx1"/>
+        </a:solidFill>
+        <a:latin typeface="+mn-lt"/>
+        <a:ea typeface="+mn-ea"/>
+        <a:cs typeface="+mn-cs"/>
+      </a:defRPr>
+    </a:lvl2pPr>
+    <a:lvl3pPr marL="914400" algn="l" defTabSz="914400" rtl="0" eaLnBrk="1" latinLnBrk="0" hangingPunct="1">
+      <a:defRPr sz="1200" kern="1200">
+        <a:solidFill>
+          <a:schemeClr val="tx1"/>
+        </a:solidFill>
+        <a:latin typeface="+mn-lt"/>
+        <a:ea typeface="+mn-ea"/>
+        <a:cs typeface="+mn-cs"/>
+      </a:defRPr>
+    </a:lvl3pPr>
+    <a:lvl4pPr marL="1371600" algn="l" defTabSz="914400" rtl="0" eaLnBrk="1" latinLnBrk="0" hangingPunct="1">
+      <a:defRPr sz="1200" kern="1200">
+        <a:solidFill>
+          <a:schemeClr val="tx1"/>
+        </a:solidFill>
+        <a:latin typeface="+mn-lt"/>
+        <a:ea typeface="+mn-ea"/>
+        <a:cs typeface="+mn-cs"/>
+      </a:defRPr>
+    </a:lvl4pPr>
+    <a:lvl5pPr marL="1828800" algn="l" defTabSz="914400" rtl="0" eaLnBrk="1" latinLnBrk="0" hangingPunct="1">
+      <a:defRPr sz="1200" kern="1200">
+        <a:solidFill>
+          <a:schemeClr val="tx1"/>
+        </a:solidFill>
+        <a:latin typeface="+mn-lt"/>
+        <a:ea typeface="+mn-ea"/>
+        <a:cs typeface="+mn-cs"/>
+      </a:defRPr>
+    </a:lvl5pPr>
+    <a:lvl6pPr marL="2286000" algn="l" defTabSz="914400" rtl="0" eaLnBrk="1" latinLnBrk="0" hangingPunct="1">
+      <a:defRPr sz="1200" kern="1200">
+        <a:solidFill>
+          <a:schemeClr val="tx1"/>
+        </a:solidFill>
+        <a:latin typeface="+mn-lt"/>
+        <a:ea typeface="+mn-ea"/>
+        <a:cs typeface="+mn-cs"/>
+      </a:defRPr>
+    </a:lvl6pPr>
+    <a:lvl7pPr marL="2743200" algn="l" defTabSz="914400" rtl="0" eaLnBrk="1" latinLnBrk="0" hangingPunct="1">
+      <a:defRPr sz="1200" kern="1200">
+        <a:solidFill>
+          <a:schemeClr val="tx1"/>
+        </a:solidFill>
+        <a:latin typeface="+mn-lt"/>
+        <a:ea typeface="+mn-ea"/>
+        <a:cs typeface="+mn-cs"/>
+      </a:defRPr>
+    </a:lvl7pPr>
+    <a:lvl8pPr marL="3200400" algn="l" defTabSz="914400" rtl="0" eaLnBrk="1" latinLnBrk="0" hangingPunct="1">
+      <a:defRPr sz="1200" kern="1200">
+        <a:solidFill>
+          <a:schemeClr val="tx1"/>
+        </a:solidFill>
+        <a:latin typeface="+mn-lt"/>
+        <a:ea typeface="+mn-ea"/>
+        <a:cs typeface="+mn-cs"/>
+      </a:defRPr>
+    </a:lvl8pPr>
+    <a:lvl9pPr marL="3657600" algn="l" defTabSz="914400" rtl="0" eaLnBrk="1" latinLnBrk="0" hangingPunct="1">
+      <a:defRPr sz="1200" kern="1200">
+        <a:solidFill>
+          <a:schemeClr val="tx1"/>
+        </a:solidFill>
+        <a:latin typeface="+mn-lt"/>
+        <a:ea typeface="+mn-ea"/>
+        <a:cs typeface="+mn-cs"/>
+      </a:defRPr>
+    </a:lvl9pPr>
+  </p:notesStyle>
+</p:notesMaster>
+</file>
+
+<file path=ppt/notesSlides/notesSlide1.xml><?xml version="1.0" encoding="utf-8"?>
+<p:notes xmlns:a="http://schemas.openxmlformats.org/drawingml/2006/main" xmlns:r="http://schemas.openxmlformats.org/officeDocument/2006/relationships" xmlns:p="http://schemas.openxmlformats.org/presentationml/2006/main">
+  <p:cSld>
+    <p:spTree>
+      <p:nvGrpSpPr>
+        <p:cNvPr id="1" name=""/>
+        <p:cNvGrpSpPr/>
+        <p:nvPr/>
+      </p:nvGrpSpPr>
+      <p:grpSpPr>
+        <a:xfrm>
+          <a:off x="0" y="0"/>
+          <a:ext cx="0" cy="0"/>
+          <a:chOff x="0" y="0"/>
+          <a:chExt cx="0" cy="0"/>
+        </a:xfrm>
+      </p:grpSpPr>
+      <p:sp>
+        <p:nvSpPr>
+          <p:cNvPr id="2" name="Slide Image Placeholder 1"/>
+          <p:cNvSpPr>
+            <a:spLocks noGrp="1" noRot="1" noChangeAspect="1"/>
+          </p:cNvSpPr>
+          <p:nvPr>
+            <p:ph type="sldImg"/>
+          </p:nvPr>
+        </p:nvSpPr>
+        <p:spPr/>
+      </p:sp>
+      <p:sp>
+        <p:nvSpPr>
+          <p:cNvPr id="3" name="Notes Placeholder 2"/>
+          <p:cNvSpPr>
+            <a:spLocks noGrp="1"/>
+          </p:cNvSpPr>
+          <p:nvPr>
+            <p:ph type="body" idx="1"/>
+          </p:nvPr>
+        </p:nvSpPr>
+        <p:spPr/>
+        <p:txBody>
+          <a:bodyPr/>
+          <a:lstStyle/>
+          <a:p>
+            <a:r>
+              <a:rPr lang="tr-TR" dirty="0"/>
+              <a:t>Bu projede Value </a:t>
+            </a:r>
+            <a:r>
+              <a:rPr lang="tr-TR" dirty="0" err="1"/>
+              <a:t>Iteration</a:t>
+            </a:r>
+            <a:r>
+              <a:rPr lang="tr-TR" dirty="0"/>
+              <a:t> Networks makalesini seçtim. Çalışmanın amacı, makalenin </a:t>
+            </a:r>
+            <a:r>
+              <a:rPr lang="tr-TR" dirty="0" err="1"/>
+              <a:t>core</a:t>
+            </a:r>
+            <a:r>
+              <a:rPr lang="tr-TR" dirty="0"/>
+              <a:t> </a:t>
+            </a:r>
+            <a:r>
+              <a:rPr lang="tr-TR" dirty="0" err="1"/>
+              <a:t>contributionu</a:t>
+            </a:r>
+            <a:r>
+              <a:rPr lang="tr-TR" dirty="0"/>
+              <a:t> olan </a:t>
+            </a:r>
+            <a:r>
+              <a:rPr lang="tr-TR" dirty="0" err="1"/>
+              <a:t>genellenebilirliği</a:t>
+            </a:r>
+            <a:r>
+              <a:rPr lang="tr-TR" dirty="0"/>
+              <a:t> test etmek.</a:t>
+            </a:r>
+            <a:br>
+              <a:rPr lang="tr-TR" dirty="0"/>
+            </a:br>
+            <a:r>
+              <a:rPr lang="tr-TR" dirty="0"/>
+              <a:t>Ayrıca modelin daha büyük ve daha karmaşık ortamlarda nasıl davrandığını test edeceğim.</a:t>
+            </a:r>
+          </a:p>
+        </p:txBody>
+      </p:sp>
+      <p:sp>
+        <p:nvSpPr>
+          <p:cNvPr id="4" name="Slide Number Placeholder 3"/>
+          <p:cNvSpPr>
+            <a:spLocks noGrp="1"/>
+          </p:cNvSpPr>
+          <p:nvPr>
+            <p:ph type="sldNum" sz="quarter" idx="5"/>
+          </p:nvPr>
+        </p:nvSpPr>
+        <p:spPr/>
+        <p:txBody>
+          <a:bodyPr/>
+          <a:lstStyle/>
+          <a:p>
+            <a:fld id="{752C7C5B-4A3C-4977-AE81-15EA38719C52}" type="slidenum">
+              <a:rPr lang="tr-TR" smtClean="0"/>
+              <a:t>1</a:t>
+            </a:fld>
+            <a:endParaRPr lang="tr-TR"/>
+          </a:p>
+        </p:txBody>
+      </p:sp>
+    </p:spTree>
+    <p:extLst>
+      <p:ext uri="{BB962C8B-B14F-4D97-AF65-F5344CB8AC3E}">
+        <p14:creationId xmlns:p14="http://schemas.microsoft.com/office/powerpoint/2010/main" val="2434963449"/>
+      </p:ext>
+    </p:extLst>
+  </p:cSld>
+  <p:clrMapOvr>
+    <a:masterClrMapping/>
+  </p:clrMapOvr>
+</p:notes>
+</file>
+
+<file path=ppt/notesSlides/notesSlide10.xml><?xml version="1.0" encoding="utf-8"?>
+<p:notes xmlns:a="http://schemas.openxmlformats.org/drawingml/2006/main" xmlns:r="http://schemas.openxmlformats.org/officeDocument/2006/relationships" xmlns:p="http://schemas.openxmlformats.org/presentationml/2006/main">
+  <p:cSld>
+    <p:spTree>
+      <p:nvGrpSpPr>
+        <p:cNvPr id="1" name=""/>
+        <p:cNvGrpSpPr/>
+        <p:nvPr/>
+      </p:nvGrpSpPr>
+      <p:grpSpPr>
+        <a:xfrm>
+          <a:off x="0" y="0"/>
+          <a:ext cx="0" cy="0"/>
+          <a:chOff x="0" y="0"/>
+          <a:chExt cx="0" cy="0"/>
+        </a:xfrm>
+      </p:grpSpPr>
+      <p:sp>
+        <p:nvSpPr>
+          <p:cNvPr id="2" name="Slide Image Placeholder 1"/>
+          <p:cNvSpPr>
+            <a:spLocks noGrp="1" noRot="1" noChangeAspect="1"/>
+          </p:cNvSpPr>
+          <p:nvPr>
+            <p:ph type="sldImg"/>
+          </p:nvPr>
+        </p:nvSpPr>
+        <p:spPr/>
+      </p:sp>
+      <p:sp>
+        <p:nvSpPr>
+          <p:cNvPr id="3" name="Notes Placeholder 2"/>
+          <p:cNvSpPr>
+            <a:spLocks noGrp="1"/>
+          </p:cNvSpPr>
+          <p:nvPr>
+            <p:ph type="body" idx="1"/>
+          </p:nvPr>
+        </p:nvSpPr>
+        <p:spPr/>
+        <p:txBody>
+          <a:bodyPr/>
+          <a:lstStyle/>
+          <a:p>
+            <a:r>
+              <a:rPr lang="tr-TR" dirty="0"/>
+              <a:t>Modelin eğitim dağılımına yakın ortamlarda iyi performans göstermesini bekliyorum.</a:t>
+            </a:r>
+            <a:br>
+              <a:rPr lang="tr-TR" dirty="0"/>
+            </a:br>
+            <a:r>
+              <a:rPr lang="tr-TR" dirty="0"/>
+              <a:t>Ancak </a:t>
+            </a:r>
+            <a:r>
+              <a:rPr lang="tr-TR" dirty="0" err="1"/>
+              <a:t>map</a:t>
+            </a:r>
+            <a:r>
+              <a:rPr lang="tr-TR" dirty="0"/>
+              <a:t> boyutu ve engel yoğunluğu arttıkça performansın düşmesi muhtemel.</a:t>
+            </a:r>
+            <a:br>
+              <a:rPr lang="tr-TR" dirty="0"/>
+            </a:br>
+            <a:r>
+              <a:rPr lang="tr-TR" dirty="0"/>
+              <a:t>Bu da </a:t>
+            </a:r>
+            <a:r>
+              <a:rPr lang="tr-TR" dirty="0" err="1"/>
+              <a:t>VIN’in</a:t>
+            </a:r>
+            <a:r>
+              <a:rPr lang="tr-TR" dirty="0"/>
+              <a:t> gerçekten </a:t>
+            </a:r>
+            <a:r>
+              <a:rPr lang="tr-TR" dirty="0" err="1"/>
+              <a:t>genellenebilir</a:t>
+            </a:r>
+            <a:r>
+              <a:rPr lang="tr-TR" dirty="0"/>
+              <a:t> olup olmadığını ortaya koyacak.</a:t>
+            </a:r>
+          </a:p>
+          <a:p>
+            <a:r>
+              <a:rPr lang="tr-TR" dirty="0" err="1"/>
+              <a:t>VIN’de</a:t>
+            </a:r>
+            <a:r>
+              <a:rPr lang="tr-TR" dirty="0"/>
+              <a:t> bilgi yayılımı </a:t>
+            </a:r>
+            <a:r>
+              <a:rPr lang="tr-TR" dirty="0" err="1"/>
+              <a:t>iteration</a:t>
+            </a:r>
+            <a:r>
+              <a:rPr lang="tr-TR" dirty="0"/>
+              <a:t> sayısına bağlı.</a:t>
+            </a:r>
+            <a:br>
+              <a:rPr lang="tr-TR" dirty="0"/>
+            </a:br>
+            <a:r>
+              <a:rPr lang="tr-TR" dirty="0"/>
+              <a:t>Küçük </a:t>
+            </a:r>
+            <a:r>
+              <a:rPr lang="tr-TR" dirty="0" err="1"/>
+              <a:t>map’lerde</a:t>
+            </a:r>
+            <a:r>
+              <a:rPr lang="tr-TR" dirty="0"/>
+              <a:t> az </a:t>
+            </a:r>
+            <a:r>
+              <a:rPr lang="tr-TR" dirty="0" err="1"/>
+              <a:t>iteration</a:t>
+            </a:r>
+            <a:r>
+              <a:rPr lang="tr-TR" dirty="0"/>
+              <a:t> yeterli ama </a:t>
+            </a:r>
+            <a:r>
+              <a:rPr lang="tr-TR" dirty="0" err="1"/>
+              <a:t>map</a:t>
+            </a:r>
+            <a:r>
+              <a:rPr lang="tr-TR" dirty="0"/>
+              <a:t> büyüdükçe hedef bilgisinin tüm </a:t>
+            </a:r>
+            <a:r>
+              <a:rPr lang="tr-TR" dirty="0" err="1"/>
+              <a:t>grid’e</a:t>
+            </a:r>
+            <a:r>
+              <a:rPr lang="tr-TR" dirty="0"/>
+              <a:t> yayılması zorlaşıyor.</a:t>
+            </a:r>
+            <a:br>
+              <a:rPr lang="tr-TR" dirty="0"/>
+            </a:br>
+            <a:r>
+              <a:rPr lang="tr-TR" dirty="0"/>
+              <a:t>Bu yüzden model daha büyük ortamlarda zorlanabilir.</a:t>
+            </a:r>
+          </a:p>
+        </p:txBody>
+      </p:sp>
+      <p:sp>
+        <p:nvSpPr>
+          <p:cNvPr id="4" name="Slide Number Placeholder 3"/>
+          <p:cNvSpPr>
+            <a:spLocks noGrp="1"/>
+          </p:cNvSpPr>
+          <p:nvPr>
+            <p:ph type="sldNum" sz="quarter" idx="5"/>
+          </p:nvPr>
+        </p:nvSpPr>
+        <p:spPr/>
+        <p:txBody>
+          <a:bodyPr/>
+          <a:lstStyle/>
+          <a:p>
+            <a:fld id="{752C7C5B-4A3C-4977-AE81-15EA38719C52}" type="slidenum">
+              <a:rPr lang="tr-TR" smtClean="0"/>
+              <a:t>12</a:t>
+            </a:fld>
+            <a:endParaRPr lang="tr-TR"/>
+          </a:p>
+        </p:txBody>
+      </p:sp>
+    </p:spTree>
+    <p:extLst>
+      <p:ext uri="{BB962C8B-B14F-4D97-AF65-F5344CB8AC3E}">
+        <p14:creationId xmlns:p14="http://schemas.microsoft.com/office/powerpoint/2010/main" val="3154894043"/>
+      </p:ext>
+    </p:extLst>
+  </p:cSld>
+  <p:clrMapOvr>
+    <a:masterClrMapping/>
+  </p:clrMapOvr>
+</p:notes>
+</file>
+
+<file path=ppt/notesSlides/notesSlide2.xml><?xml version="1.0" encoding="utf-8"?>
+<p:notes xmlns:a="http://schemas.openxmlformats.org/drawingml/2006/main" xmlns:r="http://schemas.openxmlformats.org/officeDocument/2006/relationships" xmlns:p="http://schemas.openxmlformats.org/presentationml/2006/main">
+  <p:cSld>
+    <p:spTree>
+      <p:nvGrpSpPr>
+        <p:cNvPr id="1" name=""/>
+        <p:cNvGrpSpPr/>
+        <p:nvPr/>
+      </p:nvGrpSpPr>
+      <p:grpSpPr>
+        <a:xfrm>
+          <a:off x="0" y="0"/>
+          <a:ext cx="0" cy="0"/>
+          <a:chOff x="0" y="0"/>
+          <a:chExt cx="0" cy="0"/>
+        </a:xfrm>
+      </p:grpSpPr>
+      <p:sp>
+        <p:nvSpPr>
+          <p:cNvPr id="2" name="Slide Image Placeholder 1"/>
+          <p:cNvSpPr>
+            <a:spLocks noGrp="1" noRot="1" noChangeAspect="1"/>
+          </p:cNvSpPr>
+          <p:nvPr>
+            <p:ph type="sldImg"/>
+          </p:nvPr>
+        </p:nvSpPr>
+        <p:spPr/>
+      </p:sp>
+      <p:sp>
+        <p:nvSpPr>
+          <p:cNvPr id="3" name="Notes Placeholder 2"/>
+          <p:cNvSpPr>
+            <a:spLocks noGrp="1"/>
+          </p:cNvSpPr>
+          <p:nvPr>
+            <p:ph type="body" idx="1"/>
+          </p:nvPr>
+        </p:nvSpPr>
+        <p:spPr/>
+        <p:txBody>
+          <a:bodyPr/>
+          <a:lstStyle/>
+          <a:p>
+            <a:r>
+              <a:rPr lang="tr-TR" dirty="0"/>
+              <a:t>Seçtiğim makale Tamar ve arkadaşlarının 2016 yılında </a:t>
+            </a:r>
+            <a:r>
+              <a:rPr lang="tr-TR" dirty="0" err="1"/>
+              <a:t>NeurIPS’te</a:t>
+            </a:r>
+            <a:r>
+              <a:rPr lang="tr-TR" dirty="0"/>
+              <a:t> yayınladığı Value </a:t>
+            </a:r>
+            <a:r>
+              <a:rPr lang="tr-TR" dirty="0" err="1"/>
+              <a:t>Iteration</a:t>
+            </a:r>
+            <a:r>
+              <a:rPr lang="tr-TR" dirty="0"/>
+              <a:t> Networks çalışmasıdır. </a:t>
+            </a:r>
+            <a:br>
+              <a:rPr lang="tr-TR" dirty="0"/>
+            </a:br>
+            <a:r>
+              <a:rPr lang="tr-TR" dirty="0"/>
+              <a:t>Makale, planlama algoritmalarını sinir ağlarıyla birleştiren önemli bir çalışmadır..</a:t>
+            </a:r>
+            <a:br>
+              <a:rPr lang="tr-TR" dirty="0"/>
+            </a:br>
+            <a:r>
+              <a:rPr lang="tr-TR" dirty="0"/>
+              <a:t>Ayrıca çalışmanın resmi kodu da açık olarak paylaşılmış durumda. Kendi kod </a:t>
+            </a:r>
+            <a:r>
+              <a:rPr lang="tr-TR" dirty="0" err="1"/>
+              <a:t>matlab</a:t>
+            </a:r>
+            <a:r>
+              <a:rPr lang="tr-TR" dirty="0"/>
+              <a:t> ortamında yapılmış, ben </a:t>
+            </a:r>
+            <a:r>
+              <a:rPr lang="tr-TR" dirty="0" err="1"/>
+              <a:t>kentsommer</a:t>
+            </a:r>
+            <a:r>
+              <a:rPr lang="tr-TR" dirty="0"/>
+              <a:t> a ait olan </a:t>
+            </a:r>
+            <a:r>
+              <a:rPr lang="tr-TR" dirty="0" err="1"/>
+              <a:t>pytorch</a:t>
+            </a:r>
+            <a:r>
+              <a:rPr lang="tr-TR" dirty="0"/>
+              <a:t> ortamında yazılmış kodu kullanacağım.</a:t>
+            </a:r>
+          </a:p>
+        </p:txBody>
+      </p:sp>
+      <p:sp>
+        <p:nvSpPr>
+          <p:cNvPr id="4" name="Slide Number Placeholder 3"/>
+          <p:cNvSpPr>
+            <a:spLocks noGrp="1"/>
+          </p:cNvSpPr>
+          <p:nvPr>
+            <p:ph type="sldNum" sz="quarter" idx="5"/>
+          </p:nvPr>
+        </p:nvSpPr>
+        <p:spPr/>
+        <p:txBody>
+          <a:bodyPr/>
+          <a:lstStyle/>
+          <a:p>
+            <a:fld id="{752C7C5B-4A3C-4977-AE81-15EA38719C52}" type="slidenum">
+              <a:rPr lang="tr-TR" smtClean="0"/>
+              <a:t>3</a:t>
+            </a:fld>
+            <a:endParaRPr lang="tr-TR"/>
+          </a:p>
+        </p:txBody>
+      </p:sp>
+    </p:spTree>
+    <p:extLst>
+      <p:ext uri="{BB962C8B-B14F-4D97-AF65-F5344CB8AC3E}">
+        <p14:creationId xmlns:p14="http://schemas.microsoft.com/office/powerpoint/2010/main" val="1816867731"/>
+      </p:ext>
+    </p:extLst>
+  </p:cSld>
+  <p:clrMapOvr>
+    <a:masterClrMapping/>
+  </p:clrMapOvr>
+</p:notes>
+</file>
+
+<file path=ppt/notesSlides/notesSlide3.xml><?xml version="1.0" encoding="utf-8"?>
+<p:notes xmlns:a="http://schemas.openxmlformats.org/drawingml/2006/main" xmlns:r="http://schemas.openxmlformats.org/officeDocument/2006/relationships" xmlns:p="http://schemas.openxmlformats.org/presentationml/2006/main">
+  <p:cSld>
+    <p:spTree>
+      <p:nvGrpSpPr>
+        <p:cNvPr id="1" name=""/>
+        <p:cNvGrpSpPr/>
+        <p:nvPr/>
+      </p:nvGrpSpPr>
+      <p:grpSpPr>
+        <a:xfrm>
+          <a:off x="0" y="0"/>
+          <a:ext cx="0" cy="0"/>
+          <a:chOff x="0" y="0"/>
+          <a:chExt cx="0" cy="0"/>
+        </a:xfrm>
+      </p:grpSpPr>
+      <p:sp>
+        <p:nvSpPr>
+          <p:cNvPr id="2" name="Slide Image Placeholder 1"/>
+          <p:cNvSpPr>
+            <a:spLocks noGrp="1" noRot="1" noChangeAspect="1"/>
+          </p:cNvSpPr>
+          <p:nvPr>
+            <p:ph type="sldImg"/>
+          </p:nvPr>
+        </p:nvSpPr>
+        <p:spPr/>
+      </p:sp>
+      <p:sp>
+        <p:nvSpPr>
+          <p:cNvPr id="3" name="Notes Placeholder 2"/>
+          <p:cNvSpPr>
+            <a:spLocks noGrp="1"/>
+          </p:cNvSpPr>
+          <p:nvPr>
+            <p:ph type="body" idx="1"/>
+          </p:nvPr>
+        </p:nvSpPr>
+        <p:spPr/>
+        <p:txBody>
+          <a:bodyPr/>
+          <a:lstStyle/>
+          <a:p>
+            <a:r>
+              <a:rPr lang="tr-TR" dirty="0" err="1"/>
+              <a:t>Deep</a:t>
+            </a:r>
+            <a:r>
+              <a:rPr lang="tr-TR" dirty="0"/>
+              <a:t> </a:t>
+            </a:r>
+            <a:r>
+              <a:rPr lang="tr-TR" dirty="0" err="1"/>
+              <a:t>reinforcement</a:t>
+            </a:r>
+            <a:r>
+              <a:rPr lang="tr-TR" dirty="0"/>
+              <a:t> </a:t>
+            </a:r>
+            <a:r>
+              <a:rPr lang="tr-TR" dirty="0" err="1"/>
+              <a:t>learning</a:t>
+            </a:r>
+            <a:r>
+              <a:rPr lang="tr-TR" dirty="0"/>
+              <a:t> yöntemleri genellikle reaktif çalışır ve yeni ortamlara genelleme konusunda zayıftır.</a:t>
+            </a:r>
+            <a:br>
+              <a:rPr lang="tr-TR" dirty="0"/>
+            </a:br>
+            <a:r>
+              <a:rPr lang="tr-TR" dirty="0"/>
+              <a:t>Öte yandan </a:t>
+            </a:r>
+            <a:r>
+              <a:rPr lang="tr-TR" dirty="0" err="1"/>
+              <a:t>value</a:t>
+            </a:r>
+            <a:r>
+              <a:rPr lang="tr-TR" dirty="0"/>
+              <a:t> </a:t>
+            </a:r>
+            <a:r>
+              <a:rPr lang="tr-TR" dirty="0" err="1"/>
+              <a:t>iteration</a:t>
+            </a:r>
+            <a:r>
+              <a:rPr lang="tr-TR" dirty="0"/>
+              <a:t> gibi klasik yöntemler güçlüdür ama öğrenilebilir değildir.</a:t>
+            </a:r>
+            <a:br>
+              <a:rPr lang="tr-TR" dirty="0"/>
+            </a:br>
+            <a:r>
+              <a:rPr lang="tr-TR" dirty="0"/>
+              <a:t>Bu makale bu iki yaklaşımı birleştirmeyi hedefliyor. VIN, </a:t>
+            </a:r>
+            <a:r>
+              <a:rPr lang="tr-TR" dirty="0" err="1"/>
+              <a:t>value</a:t>
+            </a:r>
+            <a:r>
+              <a:rPr lang="tr-TR" dirty="0"/>
+              <a:t> </a:t>
+            </a:r>
+            <a:r>
+              <a:rPr lang="tr-TR" dirty="0" err="1"/>
+              <a:t>iteration</a:t>
+            </a:r>
+            <a:r>
+              <a:rPr lang="tr-TR" dirty="0"/>
+              <a:t> algoritmasını </a:t>
+            </a:r>
+            <a:r>
+              <a:rPr lang="tr-TR" dirty="0" err="1"/>
+              <a:t>convolutional</a:t>
+            </a:r>
+            <a:r>
+              <a:rPr lang="tr-TR" dirty="0"/>
+              <a:t> katmanlar ile yaklaşık olarak öğreniyor.</a:t>
+            </a:r>
+            <a:br>
+              <a:rPr lang="tr-TR" dirty="0"/>
+            </a:br>
+            <a:r>
+              <a:rPr lang="tr-TR" dirty="0"/>
+              <a:t>Yani model, sadece aksiyon öğrenmek yerine bir planlama mekanizması öğreniyor.</a:t>
+            </a:r>
+          </a:p>
+          <a:p>
+            <a:r>
+              <a:rPr lang="tr-TR" dirty="0"/>
+              <a:t>Normal CNN’ler </a:t>
+            </a:r>
+            <a:r>
+              <a:rPr lang="tr-TR" dirty="0" err="1"/>
+              <a:t>reactive</a:t>
+            </a:r>
+            <a:r>
+              <a:rPr lang="tr-TR" dirty="0"/>
+              <a:t> çalışır, yani sadece mevcut duruma bakarak karar verir. Ama VIN, içindeki </a:t>
+            </a:r>
+            <a:r>
+              <a:rPr lang="tr-TR" dirty="0" err="1"/>
+              <a:t>value</a:t>
+            </a:r>
+            <a:r>
+              <a:rPr lang="tr-TR" dirty="0"/>
+              <a:t> </a:t>
+            </a:r>
+            <a:r>
+              <a:rPr lang="tr-TR" dirty="0" err="1"/>
+              <a:t>iteration</a:t>
+            </a:r>
+            <a:r>
+              <a:rPr lang="tr-TR" dirty="0"/>
+              <a:t> yapısı sayesinde gelecekteki adımları hesaba katar.</a:t>
+            </a:r>
+            <a:br>
+              <a:rPr lang="tr-TR" dirty="0"/>
+            </a:br>
+            <a:r>
+              <a:rPr lang="tr-TR" dirty="0"/>
+              <a:t>Bu yüzden özellikle uzun planlama gerektiren problemlerde daha başarılı olur.</a:t>
+            </a:r>
+          </a:p>
+        </p:txBody>
+      </p:sp>
+      <p:sp>
+        <p:nvSpPr>
+          <p:cNvPr id="4" name="Slide Number Placeholder 3"/>
+          <p:cNvSpPr>
+            <a:spLocks noGrp="1"/>
+          </p:cNvSpPr>
+          <p:nvPr>
+            <p:ph type="sldNum" sz="quarter" idx="5"/>
+          </p:nvPr>
+        </p:nvSpPr>
+        <p:spPr/>
+        <p:txBody>
+          <a:bodyPr/>
+          <a:lstStyle/>
+          <a:p>
+            <a:fld id="{752C7C5B-4A3C-4977-AE81-15EA38719C52}" type="slidenum">
+              <a:rPr lang="tr-TR" smtClean="0"/>
+              <a:t>4</a:t>
+            </a:fld>
+            <a:endParaRPr lang="tr-TR"/>
+          </a:p>
+        </p:txBody>
+      </p:sp>
+    </p:spTree>
+    <p:extLst>
+      <p:ext uri="{BB962C8B-B14F-4D97-AF65-F5344CB8AC3E}">
+        <p14:creationId xmlns:p14="http://schemas.microsoft.com/office/powerpoint/2010/main" val="1578146975"/>
+      </p:ext>
+    </p:extLst>
+  </p:cSld>
+  <p:clrMapOvr>
+    <a:masterClrMapping/>
+  </p:clrMapOvr>
+</p:notes>
+</file>
+
+<file path=ppt/notesSlides/notesSlide4.xml><?xml version="1.0" encoding="utf-8"?>
+<p:notes xmlns:a="http://schemas.openxmlformats.org/drawingml/2006/main" xmlns:r="http://schemas.openxmlformats.org/officeDocument/2006/relationships" xmlns:p="http://schemas.openxmlformats.org/presentationml/2006/main">
+  <p:cSld>
+    <p:spTree>
+      <p:nvGrpSpPr>
+        <p:cNvPr id="1" name=""/>
+        <p:cNvGrpSpPr/>
+        <p:nvPr/>
+      </p:nvGrpSpPr>
+      <p:grpSpPr>
+        <a:xfrm>
+          <a:off x="0" y="0"/>
+          <a:ext cx="0" cy="0"/>
+          <a:chOff x="0" y="0"/>
+          <a:chExt cx="0" cy="0"/>
+        </a:xfrm>
+      </p:grpSpPr>
+      <p:sp>
+        <p:nvSpPr>
+          <p:cNvPr id="2" name="Slide Image Placeholder 1"/>
+          <p:cNvSpPr>
+            <a:spLocks noGrp="1" noRot="1" noChangeAspect="1"/>
+          </p:cNvSpPr>
+          <p:nvPr>
+            <p:ph type="sldImg"/>
+          </p:nvPr>
+        </p:nvSpPr>
+        <p:spPr/>
+      </p:sp>
+      <p:sp>
+        <p:nvSpPr>
+          <p:cNvPr id="3" name="Notes Placeholder 2"/>
+          <p:cNvSpPr>
+            <a:spLocks noGrp="1"/>
+          </p:cNvSpPr>
+          <p:nvPr>
+            <p:ph type="body" idx="1"/>
+          </p:nvPr>
+        </p:nvSpPr>
+        <p:spPr/>
+        <p:txBody>
+          <a:bodyPr/>
+          <a:lstStyle/>
+          <a:p>
+            <a:r>
+              <a:rPr lang="tr-TR" dirty="0"/>
+              <a:t>VIN doğrudan aksiyon öğrenmiyor, aslında bir </a:t>
+            </a:r>
+            <a:r>
+              <a:rPr lang="tr-TR" b="1" dirty="0"/>
+              <a:t>planlama prosedürü</a:t>
+            </a:r>
+            <a:r>
+              <a:rPr lang="tr-TR" dirty="0"/>
+              <a:t> öğreniyor.</a:t>
+            </a:r>
+            <a:br>
+              <a:rPr lang="tr-TR" dirty="0"/>
+            </a:br>
+            <a:r>
+              <a:rPr lang="tr-TR" dirty="0"/>
+              <a:t>Network içinde </a:t>
+            </a:r>
+            <a:r>
+              <a:rPr lang="tr-TR" dirty="0" err="1"/>
+              <a:t>value</a:t>
+            </a:r>
+            <a:r>
+              <a:rPr lang="tr-TR" dirty="0"/>
+              <a:t> </a:t>
+            </a:r>
+            <a:r>
+              <a:rPr lang="tr-TR" dirty="0" err="1"/>
+              <a:t>iteration</a:t>
+            </a:r>
+            <a:r>
+              <a:rPr lang="tr-TR" dirty="0"/>
+              <a:t> algoritmasının bir </a:t>
+            </a:r>
+            <a:r>
+              <a:rPr lang="tr-TR" dirty="0" err="1"/>
+              <a:t>approx’ı</a:t>
+            </a:r>
+            <a:r>
+              <a:rPr lang="tr-TR" dirty="0"/>
+              <a:t> var.</a:t>
+            </a:r>
+            <a:br>
+              <a:rPr lang="tr-TR" dirty="0"/>
+            </a:br>
+            <a:r>
+              <a:rPr lang="tr-TR" dirty="0"/>
+              <a:t>Yani model, </a:t>
+            </a:r>
+            <a:r>
+              <a:rPr lang="tr-TR" dirty="0" err="1"/>
+              <a:t>state</a:t>
+            </a:r>
+            <a:r>
+              <a:rPr lang="tr-TR" dirty="0"/>
+              <a:t> değerlerini </a:t>
+            </a:r>
+            <a:r>
+              <a:rPr lang="tr-TR" dirty="0" err="1"/>
+              <a:t>iteratif</a:t>
+            </a:r>
+            <a:r>
+              <a:rPr lang="tr-TR" dirty="0"/>
+              <a:t> olarak hesaplayarak bir plan oluşturmayı öğreniyor. VIN, girdiyi aldıktan sonra önce bir </a:t>
+            </a:r>
+            <a:r>
+              <a:rPr lang="tr-TR" dirty="0" err="1"/>
+              <a:t>reward</a:t>
+            </a:r>
+            <a:r>
+              <a:rPr lang="tr-TR" dirty="0"/>
+              <a:t> </a:t>
+            </a:r>
+            <a:r>
+              <a:rPr lang="tr-TR" dirty="0" err="1"/>
+              <a:t>map</a:t>
+            </a:r>
+            <a:r>
+              <a:rPr lang="tr-TR" dirty="0"/>
+              <a:t> oluşturur.</a:t>
+            </a:r>
+            <a:br>
+              <a:rPr lang="tr-TR" dirty="0"/>
+            </a:br>
+            <a:r>
+              <a:rPr lang="tr-TR" dirty="0"/>
+              <a:t>Daha sonra k adet </a:t>
+            </a:r>
+            <a:r>
+              <a:rPr lang="tr-TR" dirty="0" err="1"/>
+              <a:t>convolution</a:t>
+            </a:r>
+            <a:r>
+              <a:rPr lang="tr-TR" dirty="0"/>
+              <a:t> ve </a:t>
+            </a:r>
+            <a:r>
+              <a:rPr lang="tr-TR" dirty="0" err="1"/>
+              <a:t>max</a:t>
+            </a:r>
+            <a:r>
+              <a:rPr lang="tr-TR" dirty="0"/>
+              <a:t> işlemi ile </a:t>
+            </a:r>
+            <a:r>
+              <a:rPr lang="tr-TR" dirty="0" err="1"/>
+              <a:t>value</a:t>
+            </a:r>
+            <a:r>
+              <a:rPr lang="tr-TR" dirty="0"/>
+              <a:t> </a:t>
+            </a:r>
+            <a:r>
+              <a:rPr lang="tr-TR" dirty="0" err="1"/>
+              <a:t>iteration</a:t>
+            </a:r>
+            <a:r>
+              <a:rPr lang="tr-TR" dirty="0"/>
+              <a:t> algoritmasını </a:t>
+            </a:r>
+            <a:r>
+              <a:rPr lang="tr-TR" dirty="0" err="1"/>
+              <a:t>approx</a:t>
+            </a:r>
+            <a:r>
+              <a:rPr lang="tr-TR" dirty="0"/>
+              <a:t> eder.</a:t>
+            </a:r>
+            <a:br>
+              <a:rPr lang="tr-TR" dirty="0"/>
+            </a:br>
+            <a:r>
+              <a:rPr lang="tr-TR" dirty="0"/>
+              <a:t>Bu işlemler sonucunda her </a:t>
+            </a:r>
+            <a:r>
+              <a:rPr lang="tr-TR" dirty="0" err="1"/>
+              <a:t>state</a:t>
+            </a:r>
+            <a:r>
+              <a:rPr lang="tr-TR" dirty="0"/>
+              <a:t> için bir değer hesaplanır.</a:t>
+            </a:r>
+            <a:br>
+              <a:rPr lang="tr-TR" dirty="0"/>
+            </a:br>
+            <a:r>
+              <a:rPr lang="tr-TR" dirty="0"/>
+              <a:t>En son aşamada bu değerler kullanılarak en iyi aksiyon seçilir.”</a:t>
+            </a:r>
+          </a:p>
+        </p:txBody>
+      </p:sp>
+      <p:sp>
+        <p:nvSpPr>
+          <p:cNvPr id="4" name="Slide Number Placeholder 3"/>
+          <p:cNvSpPr>
+            <a:spLocks noGrp="1"/>
+          </p:cNvSpPr>
+          <p:nvPr>
+            <p:ph type="sldNum" sz="quarter" idx="5"/>
+          </p:nvPr>
+        </p:nvSpPr>
+        <p:spPr/>
+        <p:txBody>
+          <a:bodyPr/>
+          <a:lstStyle/>
+          <a:p>
+            <a:fld id="{752C7C5B-4A3C-4977-AE81-15EA38719C52}" type="slidenum">
+              <a:rPr lang="tr-TR" smtClean="0"/>
+              <a:t>5</a:t>
+            </a:fld>
+            <a:endParaRPr lang="tr-TR"/>
+          </a:p>
+        </p:txBody>
+      </p:sp>
+    </p:spTree>
+    <p:extLst>
+      <p:ext uri="{BB962C8B-B14F-4D97-AF65-F5344CB8AC3E}">
+        <p14:creationId xmlns:p14="http://schemas.microsoft.com/office/powerpoint/2010/main" val="2148342548"/>
+      </p:ext>
+    </p:extLst>
+  </p:cSld>
+  <p:clrMapOvr>
+    <a:masterClrMapping/>
+  </p:clrMapOvr>
+</p:notes>
+</file>
+
+<file path=ppt/notesSlides/notesSlide5.xml><?xml version="1.0" encoding="utf-8"?>
+<p:notes xmlns:a="http://schemas.openxmlformats.org/drawingml/2006/main" xmlns:r="http://schemas.openxmlformats.org/officeDocument/2006/relationships" xmlns:p="http://schemas.openxmlformats.org/presentationml/2006/main">
+  <p:cSld>
+    <p:spTree>
+      <p:nvGrpSpPr>
+        <p:cNvPr id="1" name=""/>
+        <p:cNvGrpSpPr/>
+        <p:nvPr/>
+      </p:nvGrpSpPr>
+      <p:grpSpPr>
+        <a:xfrm>
+          <a:off x="0" y="0"/>
+          <a:ext cx="0" cy="0"/>
+          <a:chOff x="0" y="0"/>
+          <a:chExt cx="0" cy="0"/>
+        </a:xfrm>
+      </p:grpSpPr>
+      <p:sp>
+        <p:nvSpPr>
+          <p:cNvPr id="2" name="Slide Image Placeholder 1"/>
+          <p:cNvSpPr>
+            <a:spLocks noGrp="1" noRot="1" noChangeAspect="1"/>
+          </p:cNvSpPr>
+          <p:nvPr>
+            <p:ph type="sldImg"/>
+          </p:nvPr>
+        </p:nvSpPr>
+        <p:spPr/>
+      </p:sp>
+      <p:sp>
+        <p:nvSpPr>
+          <p:cNvPr id="3" name="Notes Placeholder 2"/>
+          <p:cNvSpPr>
+            <a:spLocks noGrp="1"/>
+          </p:cNvSpPr>
+          <p:nvPr>
+            <p:ph type="body" idx="1"/>
+          </p:nvPr>
+        </p:nvSpPr>
+        <p:spPr/>
+        <p:txBody>
+          <a:bodyPr/>
+          <a:lstStyle/>
+          <a:p>
+            <a:pPr marL="0" indent="0">
+              <a:buFont typeface="Arial" panose="020B0604020202020204" pitchFamily="34" charset="0"/>
+              <a:buNone/>
+            </a:pPr>
+            <a:r>
+              <a:rPr lang="tr-TR" dirty="0"/>
+              <a:t>Value </a:t>
+            </a:r>
+            <a:r>
+              <a:rPr lang="tr-TR" dirty="0" err="1"/>
+              <a:t>Iteration</a:t>
+            </a:r>
+            <a:r>
+              <a:rPr lang="tr-TR" dirty="0"/>
+              <a:t> klasik bir </a:t>
+            </a:r>
+            <a:r>
+              <a:rPr lang="tr-TR" dirty="0" err="1"/>
+              <a:t>planning</a:t>
+            </a:r>
+            <a:r>
+              <a:rPr lang="tr-TR" dirty="0"/>
+              <a:t> algoritmasıdır ve VIN doğrudan bu fikre dayanır.</a:t>
+            </a:r>
+            <a:br>
+              <a:rPr lang="tr-TR" dirty="0"/>
+            </a:br>
+            <a:r>
+              <a:rPr lang="tr-TR" dirty="0" err="1"/>
+              <a:t>Gated</a:t>
+            </a:r>
+            <a:r>
+              <a:rPr lang="tr-TR" dirty="0"/>
+              <a:t> </a:t>
+            </a:r>
+            <a:r>
+              <a:rPr lang="tr-TR" dirty="0" err="1"/>
+              <a:t>Path</a:t>
+            </a:r>
+            <a:r>
+              <a:rPr lang="tr-TR" dirty="0"/>
+              <a:t> Planning Networks, </a:t>
+            </a:r>
+            <a:r>
+              <a:rPr lang="tr-TR" dirty="0" err="1"/>
+              <a:t>VIN’in</a:t>
+            </a:r>
+            <a:r>
+              <a:rPr lang="tr-TR" dirty="0"/>
+              <a:t> mimarisini geliştirerek daha stabil bir </a:t>
+            </a:r>
+            <a:r>
+              <a:rPr lang="tr-TR" dirty="0" err="1"/>
+              <a:t>planning</a:t>
+            </a:r>
+            <a:r>
+              <a:rPr lang="tr-TR" dirty="0"/>
+              <a:t> modeli önerir. </a:t>
+            </a:r>
+            <a:r>
+              <a:rPr lang="tr-TR" dirty="0" err="1"/>
+              <a:t>VIN’de</a:t>
+            </a:r>
+            <a:r>
+              <a:rPr lang="tr-TR" dirty="0"/>
+              <a:t> </a:t>
+            </a:r>
+            <a:r>
+              <a:rPr lang="tr-TR" dirty="0" err="1"/>
+              <a:t>value</a:t>
+            </a:r>
+            <a:r>
+              <a:rPr lang="tr-TR" dirty="0"/>
+              <a:t> </a:t>
+            </a:r>
+            <a:r>
+              <a:rPr lang="tr-TR" dirty="0" err="1"/>
+              <a:t>iteration</a:t>
+            </a:r>
+            <a:r>
+              <a:rPr lang="tr-TR" dirty="0"/>
+              <a:t> işlemi </a:t>
+            </a:r>
+            <a:r>
+              <a:rPr lang="tr-TR" dirty="0" err="1"/>
+              <a:t>convolution</a:t>
+            </a:r>
+            <a:r>
+              <a:rPr lang="tr-TR" dirty="0"/>
+              <a:t> + </a:t>
+            </a:r>
+            <a:r>
+              <a:rPr lang="tr-TR" dirty="0" err="1"/>
+              <a:t>max</a:t>
+            </a:r>
+            <a:r>
+              <a:rPr lang="tr-TR" dirty="0"/>
+              <a:t> operasyonları ile yapılır.</a:t>
+            </a:r>
+            <a:br>
+              <a:rPr lang="tr-TR" dirty="0"/>
+            </a:br>
+            <a:r>
+              <a:rPr lang="tr-TR" dirty="0"/>
+              <a:t>Ama bu yapı </a:t>
+            </a:r>
+            <a:r>
+              <a:rPr lang="tr-TR" dirty="0" err="1"/>
+              <a:t>optimization</a:t>
+            </a:r>
+            <a:r>
+              <a:rPr lang="tr-TR" dirty="0"/>
+              <a:t> açısından zor ve </a:t>
+            </a:r>
+            <a:r>
+              <a:rPr lang="tr-TR" dirty="0" err="1"/>
+              <a:t>training</a:t>
+            </a:r>
+            <a:r>
+              <a:rPr lang="tr-TR" dirty="0"/>
+              <a:t> sırasında </a:t>
+            </a:r>
+            <a:r>
+              <a:rPr lang="tr-TR" dirty="0" err="1"/>
+              <a:t>unstable</a:t>
+            </a:r>
+            <a:r>
+              <a:rPr lang="tr-TR" dirty="0"/>
+              <a:t> olabilir. GPPN, </a:t>
+            </a:r>
+            <a:r>
+              <a:rPr lang="tr-TR" dirty="0" err="1"/>
+              <a:t>VIN’deki</a:t>
+            </a:r>
+            <a:r>
+              <a:rPr lang="tr-TR" dirty="0"/>
+              <a:t> </a:t>
+            </a:r>
+            <a:r>
+              <a:rPr lang="tr-TR" dirty="0" err="1"/>
+              <a:t>value</a:t>
+            </a:r>
+            <a:r>
+              <a:rPr lang="tr-TR" dirty="0"/>
+              <a:t> </a:t>
+            </a:r>
+            <a:r>
+              <a:rPr lang="tr-TR" dirty="0" err="1"/>
+              <a:t>iteration</a:t>
+            </a:r>
+            <a:r>
+              <a:rPr lang="tr-TR" dirty="0"/>
+              <a:t> modülünü kaldırıp yerine </a:t>
+            </a:r>
+            <a:r>
+              <a:rPr lang="tr-TR" b="1" dirty="0" err="1"/>
+              <a:t>gated</a:t>
+            </a:r>
+            <a:r>
+              <a:rPr lang="tr-TR" b="1" dirty="0"/>
+              <a:t> </a:t>
+            </a:r>
+            <a:r>
+              <a:rPr lang="tr-TR" b="1" dirty="0" err="1"/>
+              <a:t>recurrent</a:t>
+            </a:r>
+            <a:r>
+              <a:rPr lang="tr-TR" b="1" dirty="0"/>
+              <a:t> </a:t>
+            </a:r>
+            <a:r>
+              <a:rPr lang="tr-TR" b="1" dirty="0" err="1"/>
+              <a:t>unit</a:t>
+            </a:r>
+            <a:r>
+              <a:rPr lang="tr-TR" b="1" dirty="0"/>
+              <a:t> (GRU)</a:t>
+            </a:r>
+            <a:r>
+              <a:rPr lang="tr-TR" dirty="0"/>
+              <a:t> kullanıyor.</a:t>
+            </a:r>
+            <a:br>
+              <a:rPr lang="tr-TR" dirty="0"/>
+            </a:br>
+            <a:r>
+              <a:rPr lang="tr-TR" dirty="0"/>
+              <a:t>Yani </a:t>
+            </a:r>
+            <a:r>
+              <a:rPr lang="tr-TR" dirty="0" err="1"/>
+              <a:t>planning</a:t>
+            </a:r>
+            <a:r>
+              <a:rPr lang="tr-TR" dirty="0"/>
+              <a:t> işlemini bir </a:t>
+            </a:r>
+            <a:r>
+              <a:rPr lang="tr-TR" dirty="0" err="1"/>
+              <a:t>recurrent</a:t>
+            </a:r>
+            <a:r>
+              <a:rPr lang="tr-TR" dirty="0"/>
+              <a:t> network olarak modelliyor. GRU gibi </a:t>
+            </a:r>
+            <a:r>
+              <a:rPr lang="tr-TR" dirty="0" err="1"/>
+              <a:t>gated</a:t>
+            </a:r>
+            <a:r>
+              <a:rPr lang="tr-TR" dirty="0"/>
+              <a:t> yapılar bilgi akışını daha iyi kontrol ettiği için </a:t>
+            </a:r>
+            <a:r>
+              <a:rPr lang="tr-TR" dirty="0" err="1"/>
+              <a:t>gradient</a:t>
+            </a:r>
+            <a:r>
+              <a:rPr lang="tr-TR" dirty="0"/>
+              <a:t> problemleri azalıyor ve model daha stabil öğreniyor.</a:t>
+            </a:r>
+          </a:p>
+        </p:txBody>
+      </p:sp>
+      <p:sp>
+        <p:nvSpPr>
+          <p:cNvPr id="4" name="Slide Number Placeholder 3"/>
+          <p:cNvSpPr>
+            <a:spLocks noGrp="1"/>
+          </p:cNvSpPr>
+          <p:nvPr>
+            <p:ph type="sldNum" sz="quarter" idx="5"/>
+          </p:nvPr>
+        </p:nvSpPr>
+        <p:spPr/>
+        <p:txBody>
+          <a:bodyPr/>
+          <a:lstStyle/>
+          <a:p>
+            <a:fld id="{752C7C5B-4A3C-4977-AE81-15EA38719C52}" type="slidenum">
+              <a:rPr lang="tr-TR" smtClean="0"/>
+              <a:t>6</a:t>
+            </a:fld>
+            <a:endParaRPr lang="tr-TR"/>
+          </a:p>
+        </p:txBody>
+      </p:sp>
+    </p:spTree>
+    <p:extLst>
+      <p:ext uri="{BB962C8B-B14F-4D97-AF65-F5344CB8AC3E}">
+        <p14:creationId xmlns:p14="http://schemas.microsoft.com/office/powerpoint/2010/main" val="894159983"/>
+      </p:ext>
+    </p:extLst>
+  </p:cSld>
+  <p:clrMapOvr>
+    <a:masterClrMapping/>
+  </p:clrMapOvr>
+</p:notes>
+</file>
+
+<file path=ppt/notesSlides/notesSlide6.xml><?xml version="1.0" encoding="utf-8"?>
+<p:notes xmlns:a="http://schemas.openxmlformats.org/drawingml/2006/main" xmlns:r="http://schemas.openxmlformats.org/officeDocument/2006/relationships" xmlns:p="http://schemas.openxmlformats.org/presentationml/2006/main">
+  <p:cSld>
+    <p:spTree>
+      <p:nvGrpSpPr>
+        <p:cNvPr id="1" name=""/>
+        <p:cNvGrpSpPr/>
+        <p:nvPr/>
+      </p:nvGrpSpPr>
+      <p:grpSpPr>
+        <a:xfrm>
+          <a:off x="0" y="0"/>
+          <a:ext cx="0" cy="0"/>
+          <a:chOff x="0" y="0"/>
+          <a:chExt cx="0" cy="0"/>
+        </a:xfrm>
+      </p:grpSpPr>
+      <p:sp>
+        <p:nvSpPr>
+          <p:cNvPr id="2" name="Slide Image Placeholder 1"/>
+          <p:cNvSpPr>
+            <a:spLocks noGrp="1" noRot="1" noChangeAspect="1"/>
+          </p:cNvSpPr>
+          <p:nvPr>
+            <p:ph type="sldImg"/>
+          </p:nvPr>
+        </p:nvSpPr>
+        <p:spPr/>
+      </p:sp>
+      <p:sp>
+        <p:nvSpPr>
+          <p:cNvPr id="3" name="Notes Placeholder 2"/>
+          <p:cNvSpPr>
+            <a:spLocks noGrp="1"/>
+          </p:cNvSpPr>
+          <p:nvPr>
+            <p:ph type="body" idx="1"/>
+          </p:nvPr>
+        </p:nvSpPr>
+        <p:spPr/>
+        <p:txBody>
+          <a:bodyPr/>
+          <a:lstStyle/>
+          <a:p>
+            <a:r>
+              <a:rPr lang="tr-TR" dirty="0"/>
+              <a:t>Bu projede </a:t>
+            </a:r>
+            <a:r>
+              <a:rPr lang="tr-TR" dirty="0" err="1"/>
+              <a:t>Generalization</a:t>
+            </a:r>
+            <a:r>
+              <a:rPr lang="tr-TR" dirty="0"/>
+              <a:t> ve </a:t>
+            </a:r>
+            <a:r>
+              <a:rPr lang="tr-TR" dirty="0" err="1"/>
+              <a:t>Robustness</a:t>
+            </a:r>
+            <a:r>
+              <a:rPr lang="tr-TR" dirty="0"/>
+              <a:t> analizlerini birlikte ele alıyorum.</a:t>
+            </a:r>
+            <a:br>
+              <a:rPr lang="tr-TR" dirty="0"/>
+            </a:br>
+            <a:r>
+              <a:rPr lang="tr-TR" dirty="0"/>
+              <a:t>Amaç, </a:t>
+            </a:r>
+            <a:r>
+              <a:rPr lang="tr-TR" dirty="0" err="1"/>
+              <a:t>VIN’in</a:t>
+            </a:r>
+            <a:r>
+              <a:rPr lang="tr-TR" dirty="0"/>
+              <a:t> gerçekten </a:t>
+            </a:r>
+            <a:r>
+              <a:rPr lang="tr-TR" dirty="0" err="1"/>
+              <a:t>genellenebilir</a:t>
+            </a:r>
+            <a:r>
+              <a:rPr lang="tr-TR" dirty="0"/>
+              <a:t> bir planlama yöntemi öğrenip öğrenmediğini test etmek.</a:t>
+            </a:r>
+            <a:br>
+              <a:rPr lang="tr-TR" dirty="0"/>
+            </a:br>
+            <a:r>
+              <a:rPr lang="tr-TR" dirty="0"/>
+              <a:t>Yani model sadece eğitim verisine mi uyuyor yoksa farklı ortamlarda da çalışabiliyor mu bunu inceliyoruz.</a:t>
+            </a:r>
+          </a:p>
+        </p:txBody>
+      </p:sp>
+      <p:sp>
+        <p:nvSpPr>
+          <p:cNvPr id="4" name="Slide Number Placeholder 3"/>
+          <p:cNvSpPr>
+            <a:spLocks noGrp="1"/>
+          </p:cNvSpPr>
+          <p:nvPr>
+            <p:ph type="sldNum" sz="quarter" idx="5"/>
+          </p:nvPr>
+        </p:nvSpPr>
+        <p:spPr/>
+        <p:txBody>
+          <a:bodyPr/>
+          <a:lstStyle/>
+          <a:p>
+            <a:fld id="{752C7C5B-4A3C-4977-AE81-15EA38719C52}" type="slidenum">
+              <a:rPr lang="tr-TR" smtClean="0"/>
+              <a:t>7</a:t>
+            </a:fld>
+            <a:endParaRPr lang="tr-TR"/>
+          </a:p>
+        </p:txBody>
+      </p:sp>
+    </p:spTree>
+    <p:extLst>
+      <p:ext uri="{BB962C8B-B14F-4D97-AF65-F5344CB8AC3E}">
+        <p14:creationId xmlns:p14="http://schemas.microsoft.com/office/powerpoint/2010/main" val="2257781651"/>
+      </p:ext>
+    </p:extLst>
+  </p:cSld>
+  <p:clrMapOvr>
+    <a:masterClrMapping/>
+  </p:clrMapOvr>
+</p:notes>
+</file>
+
+<file path=ppt/notesSlides/notesSlide7.xml><?xml version="1.0" encoding="utf-8"?>
+<p:notes xmlns:a="http://schemas.openxmlformats.org/drawingml/2006/main" xmlns:r="http://schemas.openxmlformats.org/officeDocument/2006/relationships" xmlns:p="http://schemas.openxmlformats.org/presentationml/2006/main">
+  <p:cSld>
+    <p:spTree>
+      <p:nvGrpSpPr>
+        <p:cNvPr id="1" name=""/>
+        <p:cNvGrpSpPr/>
+        <p:nvPr/>
+      </p:nvGrpSpPr>
+      <p:grpSpPr>
+        <a:xfrm>
+          <a:off x="0" y="0"/>
+          <a:ext cx="0" cy="0"/>
+          <a:chOff x="0" y="0"/>
+          <a:chExt cx="0" cy="0"/>
+        </a:xfrm>
+      </p:grpSpPr>
+      <p:sp>
+        <p:nvSpPr>
+          <p:cNvPr id="2" name="Slide Image Placeholder 1"/>
+          <p:cNvSpPr>
+            <a:spLocks noGrp="1" noRot="1" noChangeAspect="1"/>
+          </p:cNvSpPr>
+          <p:nvPr>
+            <p:ph type="sldImg"/>
+          </p:nvPr>
+        </p:nvSpPr>
+        <p:spPr/>
+      </p:sp>
+      <p:sp>
+        <p:nvSpPr>
+          <p:cNvPr id="3" name="Notes Placeholder 2"/>
+          <p:cNvSpPr>
+            <a:spLocks noGrp="1"/>
+          </p:cNvSpPr>
+          <p:nvPr>
+            <p:ph type="body" idx="1"/>
+          </p:nvPr>
+        </p:nvSpPr>
+        <p:spPr/>
+        <p:txBody>
+          <a:bodyPr/>
+          <a:lstStyle/>
+          <a:p>
+            <a:r>
+              <a:rPr lang="tr-TR" dirty="0"/>
+              <a:t>Makale modelin </a:t>
+            </a:r>
+            <a:r>
+              <a:rPr lang="tr-TR" dirty="0" err="1"/>
+              <a:t>planning</a:t>
+            </a:r>
+            <a:r>
+              <a:rPr lang="tr-TR" dirty="0"/>
+              <a:t> öğrenebildiğini iddia ediyor ama sadece aynı dağılımda test ediyor.</a:t>
+            </a:r>
+            <a:br>
+              <a:rPr lang="tr-TR" dirty="0"/>
+            </a:br>
+            <a:r>
+              <a:rPr lang="tr-TR" dirty="0"/>
+              <a:t>Benim yaptığım </a:t>
+            </a:r>
+            <a:r>
+              <a:rPr lang="tr-TR" dirty="0" err="1"/>
+              <a:t>extension</a:t>
+            </a:r>
+            <a:r>
+              <a:rPr lang="tr-TR" dirty="0"/>
+              <a:t>, modelin gerçekten </a:t>
+            </a:r>
+            <a:r>
+              <a:rPr lang="tr-TR" dirty="0" err="1"/>
+              <a:t>genellenebilir</a:t>
+            </a:r>
+            <a:r>
+              <a:rPr lang="tr-TR" dirty="0"/>
+              <a:t> bir </a:t>
+            </a:r>
+            <a:r>
+              <a:rPr lang="tr-TR" dirty="0" err="1"/>
+              <a:t>planning</a:t>
+            </a:r>
+            <a:r>
+              <a:rPr lang="tr-TR" dirty="0"/>
+              <a:t> öğrenip öğrenmediğini test ediyor.</a:t>
+            </a:r>
+            <a:br>
+              <a:rPr lang="tr-TR" dirty="0"/>
+            </a:br>
+            <a:r>
+              <a:rPr lang="tr-TR" dirty="0"/>
+              <a:t>Yani daha büyük ve daha karmaşık ortamlarda performansını inceliyorum.</a:t>
+            </a:r>
+          </a:p>
+        </p:txBody>
+      </p:sp>
+      <p:sp>
+        <p:nvSpPr>
+          <p:cNvPr id="4" name="Slide Number Placeholder 3"/>
+          <p:cNvSpPr>
+            <a:spLocks noGrp="1"/>
+          </p:cNvSpPr>
+          <p:nvPr>
+            <p:ph type="sldNum" sz="quarter" idx="5"/>
+          </p:nvPr>
+        </p:nvSpPr>
+        <p:spPr/>
+        <p:txBody>
+          <a:bodyPr/>
+          <a:lstStyle/>
+          <a:p>
+            <a:fld id="{752C7C5B-4A3C-4977-AE81-15EA38719C52}" type="slidenum">
+              <a:rPr lang="tr-TR" smtClean="0"/>
+              <a:t>8</a:t>
+            </a:fld>
+            <a:endParaRPr lang="tr-TR"/>
+          </a:p>
+        </p:txBody>
+      </p:sp>
+    </p:spTree>
+    <p:extLst>
+      <p:ext uri="{BB962C8B-B14F-4D97-AF65-F5344CB8AC3E}">
+        <p14:creationId xmlns:p14="http://schemas.microsoft.com/office/powerpoint/2010/main" val="230912046"/>
+      </p:ext>
+    </p:extLst>
+  </p:cSld>
+  <p:clrMapOvr>
+    <a:masterClrMapping/>
+  </p:clrMapOvr>
+</p:notes>
+</file>
+
+<file path=ppt/notesSlides/notesSlide8.xml><?xml version="1.0" encoding="utf-8"?>
+<p:notes xmlns:a="http://schemas.openxmlformats.org/drawingml/2006/main" xmlns:r="http://schemas.openxmlformats.org/officeDocument/2006/relationships" xmlns:p="http://schemas.openxmlformats.org/presentationml/2006/main">
+  <p:cSld>
+    <p:spTree>
+      <p:nvGrpSpPr>
+        <p:cNvPr id="1" name=""/>
+        <p:cNvGrpSpPr/>
+        <p:nvPr/>
+      </p:nvGrpSpPr>
+      <p:grpSpPr>
+        <a:xfrm>
+          <a:off x="0" y="0"/>
+          <a:ext cx="0" cy="0"/>
+          <a:chOff x="0" y="0"/>
+          <a:chExt cx="0" cy="0"/>
+        </a:xfrm>
+      </p:grpSpPr>
+      <p:sp>
+        <p:nvSpPr>
+          <p:cNvPr id="2" name="Slide Image Placeholder 1"/>
+          <p:cNvSpPr>
+            <a:spLocks noGrp="1" noRot="1" noChangeAspect="1"/>
+          </p:cNvSpPr>
+          <p:nvPr>
+            <p:ph type="sldImg"/>
+          </p:nvPr>
+        </p:nvSpPr>
+        <p:spPr/>
+      </p:sp>
+      <p:sp>
+        <p:nvSpPr>
+          <p:cNvPr id="3" name="Notes Placeholder 2"/>
+          <p:cNvSpPr>
+            <a:spLocks noGrp="1"/>
+          </p:cNvSpPr>
+          <p:nvPr>
+            <p:ph type="body" idx="1"/>
+          </p:nvPr>
+        </p:nvSpPr>
+        <p:spPr/>
+        <p:txBody>
+          <a:bodyPr/>
+          <a:lstStyle/>
+          <a:p>
+            <a:r>
+              <a:rPr lang="tr-TR" dirty="0"/>
+              <a:t>“Öncelikle makaledeki temel sonuçları yeniden üretmeyi hedefliyorum.</a:t>
+            </a:r>
+            <a:br>
+              <a:rPr lang="tr-TR" dirty="0"/>
+            </a:br>
+            <a:r>
+              <a:rPr lang="tr-TR" dirty="0"/>
+              <a:t>Özellikle </a:t>
+            </a:r>
+            <a:r>
+              <a:rPr lang="tr-TR" dirty="0" err="1"/>
+              <a:t>Figure</a:t>
+            </a:r>
+            <a:r>
+              <a:rPr lang="tr-TR" dirty="0"/>
+              <a:t> 3 ve </a:t>
+            </a:r>
+            <a:r>
+              <a:rPr lang="tr-TR" dirty="0" err="1"/>
+              <a:t>Table</a:t>
+            </a:r>
+            <a:r>
+              <a:rPr lang="tr-TR" dirty="0"/>
+              <a:t> 1’i yeniden oluşturacağım.</a:t>
+            </a:r>
+            <a:br>
+              <a:rPr lang="tr-TR" dirty="0"/>
+            </a:br>
+            <a:r>
+              <a:rPr lang="tr-TR" dirty="0"/>
+              <a:t>Bu sonuçlar, modelin performansını değerlendirmek için </a:t>
+            </a:r>
+            <a:r>
+              <a:rPr lang="tr-TR" dirty="0" err="1"/>
+              <a:t>baseline</a:t>
+            </a:r>
+            <a:r>
+              <a:rPr lang="tr-TR" dirty="0"/>
+              <a:t> olarak kullanılacak.”</a:t>
+            </a:r>
+          </a:p>
+          <a:p>
+            <a:r>
+              <a:rPr lang="tr-TR" dirty="0"/>
+              <a:t>Modeli </a:t>
+            </a:r>
+            <a:r>
+              <a:rPr lang="tr-TR" dirty="0" err="1"/>
+              <a:t>PyTorch</a:t>
+            </a:r>
+            <a:r>
+              <a:rPr lang="tr-TR" dirty="0"/>
+              <a:t> </a:t>
+            </a:r>
+            <a:r>
+              <a:rPr lang="tr-TR" dirty="0" err="1"/>
+              <a:t>implementasyonu</a:t>
+            </a:r>
+            <a:r>
+              <a:rPr lang="tr-TR" dirty="0"/>
+              <a:t> üzerinden çalıştırdım.</a:t>
+            </a:r>
+            <a:br>
+              <a:rPr lang="tr-TR" dirty="0"/>
+            </a:br>
+            <a:r>
+              <a:rPr lang="tr-TR" dirty="0"/>
+              <a:t>Deneyleri kendi bilgisayarımda ve gerektiğinde </a:t>
+            </a:r>
+            <a:r>
+              <a:rPr lang="tr-TR" dirty="0" err="1"/>
+              <a:t>Colab</a:t>
+            </a:r>
+            <a:r>
+              <a:rPr lang="tr-TR" dirty="0"/>
+              <a:t> GPU üzerinde gerçekleştireceğim.</a:t>
+            </a:r>
+            <a:br>
+              <a:rPr lang="tr-TR" dirty="0"/>
+            </a:br>
+            <a:r>
+              <a:rPr lang="tr-TR" dirty="0"/>
+              <a:t>Kodun çalıştığını doğruladım.</a:t>
+            </a:r>
+          </a:p>
+        </p:txBody>
+      </p:sp>
+      <p:sp>
+        <p:nvSpPr>
+          <p:cNvPr id="4" name="Slide Number Placeholder 3"/>
+          <p:cNvSpPr>
+            <a:spLocks noGrp="1"/>
+          </p:cNvSpPr>
+          <p:nvPr>
+            <p:ph type="sldNum" sz="quarter" idx="5"/>
+          </p:nvPr>
+        </p:nvSpPr>
+        <p:spPr/>
+        <p:txBody>
+          <a:bodyPr/>
+          <a:lstStyle/>
+          <a:p>
+            <a:fld id="{752C7C5B-4A3C-4977-AE81-15EA38719C52}" type="slidenum">
+              <a:rPr lang="tr-TR" smtClean="0"/>
+              <a:t>9</a:t>
+            </a:fld>
+            <a:endParaRPr lang="tr-TR"/>
+          </a:p>
+        </p:txBody>
+      </p:sp>
+    </p:spTree>
+    <p:extLst>
+      <p:ext uri="{BB962C8B-B14F-4D97-AF65-F5344CB8AC3E}">
+        <p14:creationId xmlns:p14="http://schemas.microsoft.com/office/powerpoint/2010/main" val="834717221"/>
+      </p:ext>
+    </p:extLst>
+  </p:cSld>
+  <p:clrMapOvr>
+    <a:masterClrMapping/>
+  </p:clrMapOvr>
+</p:notes>
+</file>
+
+<file path=ppt/notesSlides/notesSlide9.xml><?xml version="1.0" encoding="utf-8"?>
+<p:notes xmlns:a="http://schemas.openxmlformats.org/drawingml/2006/main" xmlns:r="http://schemas.openxmlformats.org/officeDocument/2006/relationships" xmlns:p="http://schemas.openxmlformats.org/presentationml/2006/main">
+  <p:cSld>
+    <p:spTree>
+      <p:nvGrpSpPr>
+        <p:cNvPr id="1" name=""/>
+        <p:cNvGrpSpPr/>
+        <p:nvPr/>
+      </p:nvGrpSpPr>
+      <p:grpSpPr>
+        <a:xfrm>
+          <a:off x="0" y="0"/>
+          <a:ext cx="0" cy="0"/>
+          <a:chOff x="0" y="0"/>
+          <a:chExt cx="0" cy="0"/>
+        </a:xfrm>
+      </p:grpSpPr>
+      <p:sp>
+        <p:nvSpPr>
+          <p:cNvPr id="2" name="Slide Image Placeholder 1"/>
+          <p:cNvSpPr>
+            <a:spLocks noGrp="1" noRot="1" noChangeAspect="1"/>
+          </p:cNvSpPr>
+          <p:nvPr>
+            <p:ph type="sldImg"/>
+          </p:nvPr>
+        </p:nvSpPr>
+        <p:spPr/>
+      </p:sp>
+      <p:sp>
+        <p:nvSpPr>
+          <p:cNvPr id="3" name="Notes Placeholder 2"/>
+          <p:cNvSpPr>
+            <a:spLocks noGrp="1"/>
+          </p:cNvSpPr>
+          <p:nvPr>
+            <p:ph type="body" idx="1"/>
+          </p:nvPr>
+        </p:nvSpPr>
+        <p:spPr/>
+        <p:txBody>
+          <a:bodyPr/>
+          <a:lstStyle/>
+          <a:p>
+            <a:r>
+              <a:rPr lang="tr-TR" dirty="0"/>
+              <a:t>modeli eğitim dağılımı dışındaki ortamlarda test edeceğim.</a:t>
+            </a:r>
+            <a:br>
+              <a:rPr lang="tr-TR" dirty="0"/>
+            </a:br>
+            <a:r>
+              <a:rPr lang="tr-TR" dirty="0"/>
+              <a:t>İki ana değişkeni değiştireceğim: </a:t>
+            </a:r>
+            <a:r>
+              <a:rPr lang="tr-TR" dirty="0" err="1"/>
+              <a:t>map</a:t>
+            </a:r>
+            <a:r>
+              <a:rPr lang="tr-TR" dirty="0"/>
+              <a:t> boyutu ve engel yoğunluğu.</a:t>
+            </a:r>
+            <a:br>
+              <a:rPr lang="tr-TR" dirty="0"/>
+            </a:br>
+            <a:r>
+              <a:rPr lang="tr-TR" dirty="0"/>
+              <a:t>Bu sayede modelin genelleme ve dayanıklılık performansını ölçebileceğim. </a:t>
+            </a:r>
+          </a:p>
+          <a:p>
+            <a:r>
+              <a:rPr lang="tr-TR" dirty="0"/>
+              <a:t>Değerlendirme için makaledeki metrikleri aynen kullanacağım.</a:t>
+            </a:r>
+            <a:br>
+              <a:rPr lang="tr-TR" dirty="0"/>
+            </a:br>
+            <a:r>
+              <a:rPr lang="tr-TR" dirty="0"/>
+              <a:t>Bunlar </a:t>
+            </a:r>
+            <a:r>
+              <a:rPr lang="tr-TR" dirty="0" err="1"/>
+              <a:t>success</a:t>
+            </a:r>
+            <a:r>
+              <a:rPr lang="tr-TR" dirty="0"/>
+              <a:t> rate ve </a:t>
+            </a:r>
+            <a:r>
+              <a:rPr lang="tr-TR" dirty="0" err="1"/>
+              <a:t>path</a:t>
+            </a:r>
+            <a:r>
+              <a:rPr lang="tr-TR" dirty="0"/>
+              <a:t> </a:t>
+            </a:r>
+            <a:r>
+              <a:rPr lang="tr-TR" dirty="0" err="1"/>
+              <a:t>length</a:t>
+            </a:r>
+            <a:r>
+              <a:rPr lang="tr-TR" dirty="0"/>
+              <a:t> gibi ölçütlerdir.</a:t>
+            </a:r>
+            <a:br>
+              <a:rPr lang="tr-TR" dirty="0"/>
+            </a:br>
+            <a:r>
+              <a:rPr lang="tr-TR" dirty="0"/>
+              <a:t>Bu sayede sonuçları doğrudan makaledeki sonuçlarla karşılaştırabileceğim.</a:t>
+            </a:r>
+          </a:p>
+        </p:txBody>
+      </p:sp>
+      <p:sp>
+        <p:nvSpPr>
+          <p:cNvPr id="4" name="Slide Number Placeholder 3"/>
+          <p:cNvSpPr>
+            <a:spLocks noGrp="1"/>
+          </p:cNvSpPr>
+          <p:nvPr>
+            <p:ph type="sldNum" sz="quarter" idx="5"/>
+          </p:nvPr>
+        </p:nvSpPr>
+        <p:spPr/>
+        <p:txBody>
+          <a:bodyPr/>
+          <a:lstStyle/>
+          <a:p>
+            <a:fld id="{752C7C5B-4A3C-4977-AE81-15EA38719C52}" type="slidenum">
+              <a:rPr lang="tr-TR" smtClean="0"/>
+              <a:t>11</a:t>
+            </a:fld>
+            <a:endParaRPr lang="tr-TR"/>
+          </a:p>
+        </p:txBody>
+      </p:sp>
+    </p:spTree>
+    <p:extLst>
+      <p:ext uri="{BB962C8B-B14F-4D97-AF65-F5344CB8AC3E}">
+        <p14:creationId xmlns:p14="http://schemas.microsoft.com/office/powerpoint/2010/main" val="2513649660"/>
+      </p:ext>
+    </p:extLst>
+  </p:cSld>
+  <p:clrMapOvr>
+    <a:masterClrMapping/>
+  </p:clrMapOvr>
+</p:notes>
+</file>
+
 <file path=ppt/slideLayouts/slideLayout1.xml><?xml version="1.0" encoding="utf-8"?>
 <p:sldLayout xmlns:a="http://schemas.openxmlformats.org/drawingml/2006/main" xmlns:r="http://schemas.openxmlformats.org/officeDocument/2006/relationships" xmlns:p="http://schemas.openxmlformats.org/presentationml/2006/main" type="title" preserve="1">
   <p:cSld name="Başlık Slaydı">
@@ -3763,7 +5907,7 @@
           <a:p>
             <a:fld id="{11EAACC7-3B3F-47D1-959A-EF58926E955E}" type="datetimeFigureOut">
               <a:rPr lang="en-US" smtClean="0"/>
-              <a:t>3/16/2026</a:t>
+              <a:t>3/26/2026</a:t>
             </a:fld>
             <a:endParaRPr lang="en-US"/>
           </a:p>
@@ -3963,7 +6107,7 @@
           <a:p>
             <a:fld id="{11EAACC7-3B3F-47D1-959A-EF58926E955E}" type="datetimeFigureOut">
               <a:rPr lang="en-US" smtClean="0"/>
-              <a:t>3/16/2026</a:t>
+              <a:t>3/26/2026</a:t>
             </a:fld>
             <a:endParaRPr lang="en-US"/>
           </a:p>
@@ -4173,7 +6317,7 @@
           <a:p>
             <a:fld id="{11EAACC7-3B3F-47D1-959A-EF58926E955E}" type="datetimeFigureOut">
               <a:rPr lang="en-US" smtClean="0"/>
-              <a:t>3/16/2026</a:t>
+              <a:t>3/26/2026</a:t>
             </a:fld>
             <a:endParaRPr lang="en-US"/>
           </a:p>
@@ -4404,7 +6548,7 @@
           <a:p>
             <a:fld id="{11EAACC7-3B3F-47D1-959A-EF58926E955E}" type="datetimeFigureOut">
               <a:rPr lang="en-US" smtClean="0"/>
-              <a:t>3/16/2026</a:t>
+              <a:t>3/26/2026</a:t>
             </a:fld>
             <a:endParaRPr lang="en-US" dirty="0"/>
           </a:p>
@@ -4680,7 +6824,7 @@
           <a:p>
             <a:fld id="{11EAACC7-3B3F-47D1-959A-EF58926E955E}" type="datetimeFigureOut">
               <a:rPr lang="en-US" smtClean="0"/>
-              <a:t>3/16/2026</a:t>
+              <a:t>3/26/2026</a:t>
             </a:fld>
             <a:endParaRPr lang="en-US"/>
           </a:p>
@@ -4948,7 +7092,7 @@
           <a:p>
             <a:fld id="{11EAACC7-3B3F-47D1-959A-EF58926E955E}" type="datetimeFigureOut">
               <a:rPr lang="en-US" smtClean="0"/>
-              <a:t>3/16/2026</a:t>
+              <a:t>3/26/2026</a:t>
             </a:fld>
             <a:endParaRPr lang="en-US"/>
           </a:p>
@@ -5367,7 +7511,7 @@
           <a:p>
             <a:fld id="{11EAACC7-3B3F-47D1-959A-EF58926E955E}" type="datetimeFigureOut">
               <a:rPr lang="en-US" smtClean="0"/>
-              <a:t>3/16/2026</a:t>
+              <a:t>3/26/2026</a:t>
             </a:fld>
             <a:endParaRPr lang="en-US"/>
           </a:p>
@@ -5509,7 +7653,7 @@
           <a:p>
             <a:fld id="{11EAACC7-3B3F-47D1-959A-EF58926E955E}" type="datetimeFigureOut">
               <a:rPr lang="en-US" smtClean="0"/>
-              <a:t>3/16/2026</a:t>
+              <a:t>3/26/2026</a:t>
             </a:fld>
             <a:endParaRPr lang="en-US"/>
           </a:p>
@@ -5622,7 +7766,7 @@
           <a:p>
             <a:fld id="{11EAACC7-3B3F-47D1-959A-EF58926E955E}" type="datetimeFigureOut">
               <a:rPr lang="en-US" smtClean="0"/>
-              <a:t>3/16/2026</a:t>
+              <a:t>3/26/2026</a:t>
             </a:fld>
             <a:endParaRPr lang="en-US"/>
           </a:p>
@@ -5935,7 +8079,7 @@
           <a:p>
             <a:fld id="{11EAACC7-3B3F-47D1-959A-EF58926E955E}" type="datetimeFigureOut">
               <a:rPr lang="en-US" smtClean="0"/>
-              <a:t>3/16/2026</a:t>
+              <a:t>3/26/2026</a:t>
             </a:fld>
             <a:endParaRPr lang="en-US"/>
           </a:p>
@@ -6228,7 +8372,7 @@
           <a:p>
             <a:fld id="{11EAACC7-3B3F-47D1-959A-EF58926E955E}" type="datetimeFigureOut">
               <a:rPr lang="en-US" smtClean="0"/>
-              <a:t>3/16/2026</a:t>
+              <a:t>3/26/2026</a:t>
             </a:fld>
             <a:endParaRPr lang="en-US"/>
           </a:p>
@@ -6787,7 +8931,7 @@
           <a:p>
             <a:fld id="{11EAACC7-3B3F-47D1-959A-EF58926E955E}" type="datetimeFigureOut">
               <a:rPr lang="en-US" smtClean="0"/>
-              <a:t>3/16/2026</a:t>
+              <a:t>3/26/2026</a:t>
             </a:fld>
             <a:endParaRPr lang="en-US"/>
           </a:p>
@@ -7858,6 +10002,1084 @@
 </p:sld>
 </file>
 
+<file path=ppt/slides/slide10.xml><?xml version="1.0" encoding="utf-8"?>
+<p:sld xmlns:a="http://schemas.openxmlformats.org/drawingml/2006/main" xmlns:r="http://schemas.openxmlformats.org/officeDocument/2006/relationships" xmlns:p="http://schemas.openxmlformats.org/presentationml/2006/main">
+  <p:cSld>
+    <p:spTree>
+      <p:nvGrpSpPr>
+        <p:cNvPr id="1" name=""/>
+        <p:cNvGrpSpPr/>
+        <p:nvPr/>
+      </p:nvGrpSpPr>
+      <p:grpSpPr>
+        <a:xfrm>
+          <a:off x="0" y="0"/>
+          <a:ext cx="0" cy="0"/>
+          <a:chOff x="0" y="0"/>
+          <a:chExt cx="0" cy="0"/>
+        </a:xfrm>
+      </p:grpSpPr>
+      <p:sp>
+        <p:nvSpPr>
+          <p:cNvPr id="2" name="Title 1">
+            <a:extLst>
+              <a:ext uri="{FF2B5EF4-FFF2-40B4-BE49-F238E27FC236}">
+                <a16:creationId xmlns:a16="http://schemas.microsoft.com/office/drawing/2014/main" id="{8BE9DE87-EE85-4AF7-92E4-6856372E1C0C}"/>
+              </a:ext>
+            </a:extLst>
+          </p:cNvPr>
+          <p:cNvSpPr>
+            <a:spLocks noGrp="1"/>
+          </p:cNvSpPr>
+          <p:nvPr>
+            <p:ph type="title"/>
+          </p:nvPr>
+        </p:nvSpPr>
+        <p:spPr>
+          <a:xfrm>
+            <a:off x="1143000" y="421434"/>
+            <a:ext cx="9906000" cy="1382156"/>
+          </a:xfrm>
+        </p:spPr>
+        <p:txBody>
+          <a:bodyPr/>
+          <a:lstStyle/>
+          <a:p>
+            <a:r>
+              <a:rPr lang="tr-TR" dirty="0" err="1">
+                <a:latin typeface="Abadi" panose="020B0604020104020204" pitchFamily="34" charset="0"/>
+              </a:rPr>
+              <a:t>Implementatıon</a:t>
+            </a:r>
+            <a:r>
+              <a:rPr lang="tr-TR" dirty="0">
+                <a:latin typeface="Abadi" panose="020B0604020104020204" pitchFamily="34" charset="0"/>
+              </a:rPr>
+              <a:t> </a:t>
+            </a:r>
+            <a:r>
+              <a:rPr lang="tr-TR" dirty="0" err="1">
+                <a:latin typeface="Abadi" panose="020B0604020104020204" pitchFamily="34" charset="0"/>
+              </a:rPr>
+              <a:t>Issues</a:t>
+            </a:r>
+            <a:r>
+              <a:rPr lang="tr-TR" dirty="0">
+                <a:latin typeface="Abadi" panose="020B0604020104020204" pitchFamily="34" charset="0"/>
+              </a:rPr>
+              <a:t> </a:t>
+            </a:r>
+            <a:r>
+              <a:rPr lang="tr-TR" dirty="0" err="1">
+                <a:latin typeface="Abadi" panose="020B0604020104020204" pitchFamily="34" charset="0"/>
+              </a:rPr>
+              <a:t>Encountered</a:t>
+            </a:r>
+            <a:r>
+              <a:rPr lang="tr-TR" dirty="0">
+                <a:latin typeface="Abadi" panose="020B0604020104020204" pitchFamily="34" charset="0"/>
+              </a:rPr>
+              <a:t> &amp; </a:t>
+            </a:r>
+            <a:r>
+              <a:rPr lang="tr-TR" dirty="0" err="1">
+                <a:latin typeface="Abadi" panose="020B0604020104020204" pitchFamily="34" charset="0"/>
+              </a:rPr>
+              <a:t>fıxed</a:t>
+            </a:r>
+            <a:endParaRPr lang="tr-TR" dirty="0">
+              <a:latin typeface="Abadi" panose="020B0604020104020204" pitchFamily="34" charset="0"/>
+            </a:endParaRPr>
+          </a:p>
+        </p:txBody>
+      </p:sp>
+      <p:sp>
+        <p:nvSpPr>
+          <p:cNvPr id="3" name="Content Placeholder 2">
+            <a:extLst>
+              <a:ext uri="{FF2B5EF4-FFF2-40B4-BE49-F238E27FC236}">
+                <a16:creationId xmlns:a16="http://schemas.microsoft.com/office/drawing/2014/main" id="{6945FA69-6DDC-4675-A7D3-4907C62F8BC7}"/>
+              </a:ext>
+            </a:extLst>
+          </p:cNvPr>
+          <p:cNvSpPr>
+            <a:spLocks noGrp="1"/>
+          </p:cNvSpPr>
+          <p:nvPr>
+            <p:ph idx="1"/>
+          </p:nvPr>
+        </p:nvSpPr>
+        <p:spPr>
+          <a:xfrm>
+            <a:off x="919066" y="1915557"/>
+            <a:ext cx="9906000" cy="4024424"/>
+          </a:xfrm>
+        </p:spPr>
+        <p:txBody>
+          <a:bodyPr/>
+          <a:lstStyle/>
+          <a:p>
+            <a:r>
+              <a:rPr lang="en-US" b="1" dirty="0"/>
+              <a:t>Coordinate system inconsistency</a:t>
+            </a:r>
+            <a:br>
+              <a:rPr lang="en-US" dirty="0"/>
+            </a:br>
+            <a:r>
+              <a:rPr lang="en-US" dirty="0"/>
+              <a:t>Row–column mismatch in grid representation caused incorrect movement directions</a:t>
+            </a:r>
+          </a:p>
+          <a:p>
+            <a:r>
+              <a:rPr lang="en-US" dirty="0"/>
+              <a:t> </a:t>
+            </a:r>
+            <a:r>
+              <a:rPr lang="en-US" b="1" dirty="0"/>
+              <a:t>Path generation failure</a:t>
+            </a:r>
+            <a:br>
+              <a:rPr lang="en-US" dirty="0"/>
+            </a:br>
+            <a:r>
+              <a:rPr lang="en-US" dirty="0"/>
+              <a:t>Incorrect data structure in shortest-path tracing resulted in empty trajectories</a:t>
+            </a:r>
+          </a:p>
+          <a:p>
+            <a:r>
+              <a:rPr lang="en-US" dirty="0"/>
+              <a:t> </a:t>
+            </a:r>
+            <a:r>
+              <a:rPr lang="en-US" b="1" dirty="0"/>
+              <a:t>Dataset inconsistency</a:t>
+            </a:r>
+            <a:br>
+              <a:rPr lang="en-US" dirty="0"/>
+            </a:br>
+            <a:r>
+              <a:rPr lang="en-US" dirty="0"/>
+              <a:t>Initial dataset contained invalid trajectories due to environment bugs and had to be regenerated</a:t>
+            </a:r>
+          </a:p>
+          <a:p>
+            <a:r>
+              <a:rPr lang="en-US" b="1" dirty="0"/>
+              <a:t>Input formatting issues</a:t>
+            </a:r>
+            <a:br>
+              <a:rPr lang="en-US" dirty="0"/>
+            </a:br>
+            <a:r>
+              <a:rPr lang="en-US" dirty="0"/>
+              <a:t>State inputs were not properly converted to tensors, causing malformed model inputs</a:t>
+            </a:r>
+          </a:p>
+          <a:p>
+            <a:endParaRPr lang="tr-TR" dirty="0"/>
+          </a:p>
+        </p:txBody>
+      </p:sp>
+    </p:spTree>
+    <p:extLst>
+      <p:ext uri="{BB962C8B-B14F-4D97-AF65-F5344CB8AC3E}">
+        <p14:creationId xmlns:p14="http://schemas.microsoft.com/office/powerpoint/2010/main" val="1653461397"/>
+      </p:ext>
+    </p:extLst>
+  </p:cSld>
+  <p:clrMapOvr>
+    <a:masterClrMapping/>
+  </p:clrMapOvr>
+</p:sld>
+</file>
+
+<file path=ppt/slides/slide11.xml><?xml version="1.0" encoding="utf-8"?>
+<p:sld xmlns:a="http://schemas.openxmlformats.org/drawingml/2006/main" xmlns:r="http://schemas.openxmlformats.org/officeDocument/2006/relationships" xmlns:p="http://schemas.openxmlformats.org/presentationml/2006/main">
+  <p:cSld>
+    <p:spTree>
+      <p:nvGrpSpPr>
+        <p:cNvPr id="1" name=""/>
+        <p:cNvGrpSpPr/>
+        <p:nvPr/>
+      </p:nvGrpSpPr>
+      <p:grpSpPr>
+        <a:xfrm>
+          <a:off x="0" y="0"/>
+          <a:ext cx="0" cy="0"/>
+          <a:chOff x="0" y="0"/>
+          <a:chExt cx="0" cy="0"/>
+        </a:xfrm>
+      </p:grpSpPr>
+      <p:sp>
+        <p:nvSpPr>
+          <p:cNvPr id="2" name="Title 1">
+            <a:extLst>
+              <a:ext uri="{FF2B5EF4-FFF2-40B4-BE49-F238E27FC236}">
+                <a16:creationId xmlns:a16="http://schemas.microsoft.com/office/drawing/2014/main" id="{5AA7DB98-7A44-4A62-BC4F-C3E48D611A92}"/>
+              </a:ext>
+            </a:extLst>
+          </p:cNvPr>
+          <p:cNvSpPr>
+            <a:spLocks noGrp="1"/>
+          </p:cNvSpPr>
+          <p:nvPr>
+            <p:ph type="title"/>
+          </p:nvPr>
+        </p:nvSpPr>
+        <p:spPr>
+          <a:xfrm>
+            <a:off x="872412" y="132944"/>
+            <a:ext cx="5015204" cy="818778"/>
+          </a:xfrm>
+        </p:spPr>
+        <p:txBody>
+          <a:bodyPr/>
+          <a:lstStyle/>
+          <a:p>
+            <a:r>
+              <a:rPr lang="tr-TR" dirty="0" err="1">
+                <a:latin typeface="Abadi" panose="020B0604020104020204" pitchFamily="34" charset="0"/>
+              </a:rPr>
+              <a:t>Extensıon</a:t>
+            </a:r>
+            <a:r>
+              <a:rPr lang="tr-TR" dirty="0">
+                <a:latin typeface="Abadi" panose="020B0604020104020204" pitchFamily="34" charset="0"/>
+              </a:rPr>
+              <a:t> plan</a:t>
+            </a:r>
+          </a:p>
+        </p:txBody>
+      </p:sp>
+      <p:sp>
+        <p:nvSpPr>
+          <p:cNvPr id="3" name="Content Placeholder 2">
+            <a:extLst>
+              <a:ext uri="{FF2B5EF4-FFF2-40B4-BE49-F238E27FC236}">
+                <a16:creationId xmlns:a16="http://schemas.microsoft.com/office/drawing/2014/main" id="{81F0067B-9BE2-46FB-8FBB-23269B27DF79}"/>
+              </a:ext>
+            </a:extLst>
+          </p:cNvPr>
+          <p:cNvSpPr>
+            <a:spLocks noGrp="1"/>
+          </p:cNvSpPr>
+          <p:nvPr>
+            <p:ph idx="1"/>
+          </p:nvPr>
+        </p:nvSpPr>
+        <p:spPr>
+          <a:xfrm>
+            <a:off x="872412" y="951721"/>
+            <a:ext cx="10924592" cy="5551716"/>
+          </a:xfrm>
+        </p:spPr>
+        <p:txBody>
+          <a:bodyPr>
+            <a:normAutofit/>
+          </a:bodyPr>
+          <a:lstStyle/>
+          <a:p>
+            <a:pPr marL="0" indent="0">
+              <a:buNone/>
+            </a:pPr>
+            <a:r>
+              <a:rPr lang="tr-TR" dirty="0"/>
+              <a:t>I </a:t>
+            </a:r>
+            <a:r>
+              <a:rPr lang="tr-TR" dirty="0" err="1"/>
+              <a:t>will</a:t>
+            </a:r>
+            <a:r>
+              <a:rPr lang="en-US" dirty="0"/>
+              <a:t> extend the original experiments by evaluating VIN under </a:t>
+            </a:r>
+            <a:r>
+              <a:rPr lang="en-US" b="1" dirty="0">
+                <a:solidFill>
+                  <a:schemeClr val="accent1"/>
+                </a:solidFill>
+              </a:rPr>
+              <a:t>out-of-distribution environments</a:t>
+            </a:r>
+            <a:r>
+              <a:rPr lang="en-US" dirty="0">
+                <a:solidFill>
+                  <a:schemeClr val="accent1"/>
+                </a:solidFill>
+              </a:rPr>
+              <a:t>.</a:t>
+            </a:r>
+          </a:p>
+          <a:p>
+            <a:pPr marL="0" indent="0">
+              <a:buNone/>
+            </a:pPr>
+            <a:r>
+              <a:rPr lang="en-US" dirty="0"/>
+              <a:t>Two variables will be modified:</a:t>
+            </a:r>
+          </a:p>
+          <a:p>
+            <a:pPr lvl="1"/>
+            <a:r>
+              <a:rPr lang="en-US" sz="2200" dirty="0"/>
+              <a:t>Map size</a:t>
+            </a:r>
+          </a:p>
+          <a:p>
+            <a:pPr lvl="1"/>
+            <a:r>
+              <a:rPr lang="en-US" sz="2200" dirty="0"/>
+              <a:t>Obstacle density</a:t>
+            </a:r>
+            <a:endParaRPr lang="tr-TR" sz="2200" dirty="0"/>
+          </a:p>
+          <a:p>
+            <a:pPr marL="457200" lvl="1" indent="0">
+              <a:buNone/>
+            </a:pPr>
+            <a:endParaRPr lang="en-US" dirty="0"/>
+          </a:p>
+          <a:p>
+            <a:pPr marL="0" indent="0">
+              <a:buNone/>
+            </a:pPr>
+            <a:r>
+              <a:rPr lang="tr-TR" b="1" dirty="0" err="1">
+                <a:solidFill>
+                  <a:schemeClr val="accent1"/>
+                </a:solidFill>
+              </a:rPr>
+              <a:t>Generalization</a:t>
+            </a:r>
+            <a:r>
+              <a:rPr lang="tr-TR" dirty="0"/>
+              <a:t>: Training </a:t>
+            </a:r>
+            <a:r>
+              <a:rPr lang="tr-TR" dirty="0" err="1"/>
+              <a:t>will</a:t>
+            </a:r>
+            <a:r>
+              <a:rPr lang="tr-TR" dirty="0"/>
+              <a:t> be done at 8 × 8 </a:t>
+            </a:r>
+            <a:r>
+              <a:rPr lang="tr-TR" dirty="0" err="1"/>
+              <a:t>maps</a:t>
+            </a:r>
+            <a:r>
+              <a:rPr lang="tr-TR" dirty="0"/>
+              <a:t> </a:t>
+            </a:r>
+            <a:r>
+              <a:rPr lang="tr-TR" dirty="0" err="1"/>
+              <a:t>and</a:t>
+            </a:r>
+            <a:r>
+              <a:rPr lang="tr-TR" dirty="0"/>
+              <a:t> </a:t>
+            </a:r>
+            <a:r>
+              <a:rPr lang="tr-TR" dirty="0" err="1"/>
+              <a:t>testing</a:t>
+            </a:r>
+            <a:r>
+              <a:rPr lang="tr-TR" dirty="0"/>
+              <a:t> </a:t>
+            </a:r>
+            <a:r>
+              <a:rPr lang="tr-TR" dirty="0" err="1"/>
+              <a:t>will</a:t>
+            </a:r>
+            <a:r>
+              <a:rPr lang="tr-TR" dirty="0"/>
+              <a:t> be on 12 × 12 </a:t>
+            </a:r>
+            <a:r>
+              <a:rPr lang="tr-TR" dirty="0" err="1"/>
+              <a:t>and</a:t>
+            </a:r>
+            <a:r>
+              <a:rPr lang="tr-TR" dirty="0"/>
+              <a:t> 16 × 16 </a:t>
+            </a:r>
+            <a:r>
+              <a:rPr lang="tr-TR" dirty="0" err="1"/>
+              <a:t>maps</a:t>
+            </a:r>
+            <a:r>
+              <a:rPr lang="tr-TR" dirty="0"/>
+              <a:t>. </a:t>
+            </a:r>
+            <a:r>
+              <a:rPr lang="tr-TR" dirty="0" err="1"/>
+              <a:t>That</a:t>
+            </a:r>
+            <a:r>
+              <a:rPr lang="tr-TR" dirty="0"/>
+              <a:t> </a:t>
+            </a:r>
+            <a:r>
+              <a:rPr lang="tr-TR" dirty="0" err="1"/>
+              <a:t>way</a:t>
+            </a:r>
+            <a:r>
+              <a:rPr lang="tr-TR" dirty="0"/>
+              <a:t> </a:t>
+            </a:r>
+            <a:r>
+              <a:rPr lang="tr-TR" dirty="0" err="1"/>
+              <a:t>the</a:t>
+            </a:r>
+            <a:r>
+              <a:rPr lang="tr-TR" dirty="0"/>
+              <a:t> </a:t>
+            </a:r>
+            <a:r>
+              <a:rPr lang="en-US" dirty="0"/>
+              <a:t>scalability of the learned planning mod</a:t>
+            </a:r>
+            <a:r>
+              <a:rPr lang="tr-TR" dirty="0"/>
+              <a:t>u</a:t>
+            </a:r>
+            <a:r>
+              <a:rPr lang="en-US" dirty="0"/>
+              <a:t>le</a:t>
+            </a:r>
+            <a:r>
+              <a:rPr lang="tr-TR" dirty="0"/>
+              <a:t> </a:t>
+            </a:r>
+            <a:r>
+              <a:rPr lang="tr-TR" dirty="0" err="1"/>
+              <a:t>will</a:t>
+            </a:r>
+            <a:r>
+              <a:rPr lang="tr-TR" dirty="0"/>
+              <a:t> be </a:t>
+            </a:r>
+            <a:r>
+              <a:rPr lang="tr-TR" dirty="0" err="1"/>
+              <a:t>evaluated</a:t>
+            </a:r>
+            <a:r>
+              <a:rPr lang="tr-TR" dirty="0"/>
+              <a:t>.</a:t>
+            </a:r>
+          </a:p>
+          <a:p>
+            <a:pPr marL="0" indent="0">
+              <a:buNone/>
+            </a:pPr>
+            <a:r>
+              <a:rPr lang="tr-TR" b="1" dirty="0" err="1">
+                <a:solidFill>
+                  <a:schemeClr val="accent1"/>
+                </a:solidFill>
+              </a:rPr>
+              <a:t>Robustness</a:t>
+            </a:r>
+            <a:r>
+              <a:rPr lang="tr-TR" b="1" dirty="0">
+                <a:solidFill>
+                  <a:schemeClr val="accent1"/>
+                </a:solidFill>
+              </a:rPr>
+              <a:t>: </a:t>
+            </a:r>
+            <a:r>
+              <a:rPr lang="tr-TR" dirty="0" err="1"/>
+              <a:t>The</a:t>
+            </a:r>
+            <a:r>
+              <a:rPr lang="tr-TR" dirty="0"/>
+              <a:t> </a:t>
+            </a:r>
+            <a:r>
+              <a:rPr lang="tr-TR" dirty="0" err="1"/>
+              <a:t>trained</a:t>
+            </a:r>
+            <a:r>
+              <a:rPr lang="tr-TR" dirty="0"/>
+              <a:t> model </a:t>
+            </a:r>
+            <a:r>
+              <a:rPr lang="tr-TR" dirty="0" err="1"/>
+              <a:t>will</a:t>
+            </a:r>
+            <a:r>
+              <a:rPr lang="tr-TR" dirty="0"/>
+              <a:t> be </a:t>
+            </a:r>
+            <a:r>
+              <a:rPr lang="tr-TR" dirty="0" err="1"/>
+              <a:t>tested</a:t>
+            </a:r>
+            <a:r>
+              <a:rPr lang="tr-TR" dirty="0"/>
+              <a:t> on </a:t>
+            </a:r>
+            <a:r>
+              <a:rPr lang="tr-TR" dirty="0" err="1"/>
+              <a:t>the</a:t>
+            </a:r>
+            <a:r>
+              <a:rPr lang="tr-TR" dirty="0"/>
+              <a:t> </a:t>
+            </a:r>
+            <a:r>
+              <a:rPr lang="tr-TR" dirty="0" err="1"/>
+              <a:t>maps</a:t>
+            </a:r>
+            <a:r>
+              <a:rPr lang="tr-TR" dirty="0"/>
+              <a:t> </a:t>
+            </a:r>
+            <a:r>
+              <a:rPr lang="tr-TR" dirty="0" err="1"/>
+              <a:t>with</a:t>
+            </a:r>
+            <a:r>
+              <a:rPr lang="tr-TR" dirty="0"/>
+              <a:t> </a:t>
+            </a:r>
+            <a:r>
+              <a:rPr lang="tr-TR" dirty="0" err="1"/>
+              <a:t>increasing</a:t>
+            </a:r>
+            <a:r>
+              <a:rPr lang="tr-TR" dirty="0"/>
+              <a:t> </a:t>
+            </a:r>
+            <a:r>
+              <a:rPr lang="tr-TR" dirty="0" err="1"/>
+              <a:t>density</a:t>
+            </a:r>
+            <a:r>
+              <a:rPr lang="tr-TR" dirty="0"/>
+              <a:t>.</a:t>
+            </a:r>
+          </a:p>
+          <a:p>
+            <a:pPr marL="0" indent="0">
+              <a:buNone/>
+            </a:pPr>
+            <a:endParaRPr lang="en-US" dirty="0"/>
+          </a:p>
+          <a:p>
+            <a:pPr marL="0" indent="0">
+              <a:buNone/>
+            </a:pPr>
+            <a:r>
+              <a:rPr lang="tr-TR" b="1" dirty="0" err="1">
+                <a:solidFill>
+                  <a:schemeClr val="accent1"/>
+                </a:solidFill>
+              </a:rPr>
+              <a:t>Metrics</a:t>
+            </a:r>
+            <a:r>
+              <a:rPr lang="tr-TR" b="1" dirty="0">
+                <a:solidFill>
+                  <a:schemeClr val="accent1"/>
+                </a:solidFill>
+              </a:rPr>
+              <a:t>: </a:t>
+            </a:r>
+            <a:r>
+              <a:rPr lang="en-US" dirty="0"/>
+              <a:t>To ensure comparability with the original paper, </a:t>
+            </a:r>
+            <a:r>
+              <a:rPr lang="tr-TR" dirty="0" err="1"/>
+              <a:t>metrics</a:t>
+            </a:r>
+            <a:r>
+              <a:rPr lang="tr-TR" dirty="0"/>
+              <a:t> </a:t>
+            </a:r>
+            <a:r>
+              <a:rPr lang="tr-TR" dirty="0" err="1"/>
+              <a:t>will</a:t>
+            </a:r>
+            <a:r>
+              <a:rPr lang="tr-TR" dirty="0"/>
+              <a:t> be</a:t>
+            </a:r>
+            <a:r>
+              <a:rPr lang="en-US" dirty="0"/>
+              <a:t>:</a:t>
+            </a:r>
+            <a:r>
+              <a:rPr lang="tr-TR" dirty="0"/>
+              <a:t> </a:t>
+            </a:r>
+            <a:r>
+              <a:rPr lang="en-US" dirty="0"/>
+              <a:t> Success rate</a:t>
+            </a:r>
+            <a:r>
+              <a:rPr lang="tr-TR" dirty="0"/>
+              <a:t>, A</a:t>
+            </a:r>
+            <a:r>
+              <a:rPr lang="en-US" dirty="0" err="1"/>
+              <a:t>verage</a:t>
+            </a:r>
+            <a:r>
+              <a:rPr lang="en-US" dirty="0"/>
+              <a:t> path length</a:t>
+            </a:r>
+            <a:r>
+              <a:rPr lang="tr-TR" dirty="0"/>
+              <a:t>, </a:t>
+            </a:r>
+            <a:r>
+              <a:rPr lang="en-US" dirty="0"/>
+              <a:t>Optimality ratio relative to shortest path</a:t>
+            </a:r>
+            <a:r>
+              <a:rPr lang="tr-TR" dirty="0"/>
+              <a:t>. </a:t>
+            </a:r>
+            <a:r>
+              <a:rPr lang="en-US" dirty="0"/>
+              <a:t>These metrics allow </a:t>
+            </a:r>
+            <a:r>
+              <a:rPr lang="en-US" b="1" dirty="0"/>
+              <a:t>direct comparison with the reproduced baseline results</a:t>
+            </a:r>
+            <a:r>
+              <a:rPr lang="en-US" dirty="0"/>
+              <a:t>.</a:t>
+            </a:r>
+          </a:p>
+          <a:p>
+            <a:pPr marL="0" indent="0">
+              <a:buNone/>
+            </a:pPr>
+            <a:endParaRPr lang="tr-TR" dirty="0"/>
+          </a:p>
+        </p:txBody>
+      </p:sp>
+    </p:spTree>
+    <p:extLst>
+      <p:ext uri="{BB962C8B-B14F-4D97-AF65-F5344CB8AC3E}">
+        <p14:creationId xmlns:p14="http://schemas.microsoft.com/office/powerpoint/2010/main" val="3305720582"/>
+      </p:ext>
+    </p:extLst>
+  </p:cSld>
+  <p:clrMapOvr>
+    <a:masterClrMapping/>
+  </p:clrMapOvr>
+</p:sld>
+</file>
+
+<file path=ppt/slides/slide12.xml><?xml version="1.0" encoding="utf-8"?>
+<p:sld xmlns:a="http://schemas.openxmlformats.org/drawingml/2006/main" xmlns:r="http://schemas.openxmlformats.org/officeDocument/2006/relationships" xmlns:p="http://schemas.openxmlformats.org/presentationml/2006/main">
+  <p:cSld>
+    <p:spTree>
+      <p:nvGrpSpPr>
+        <p:cNvPr id="1" name=""/>
+        <p:cNvGrpSpPr/>
+        <p:nvPr/>
+      </p:nvGrpSpPr>
+      <p:grpSpPr>
+        <a:xfrm>
+          <a:off x="0" y="0"/>
+          <a:ext cx="0" cy="0"/>
+          <a:chOff x="0" y="0"/>
+          <a:chExt cx="0" cy="0"/>
+        </a:xfrm>
+      </p:grpSpPr>
+      <p:sp>
+        <p:nvSpPr>
+          <p:cNvPr id="2" name="Başlık 1">
+            <a:extLst>
+              <a:ext uri="{FF2B5EF4-FFF2-40B4-BE49-F238E27FC236}">
+                <a16:creationId xmlns:a16="http://schemas.microsoft.com/office/drawing/2014/main" id="{55BBE915-79F0-6A09-325A-C8D6C596384B}"/>
+              </a:ext>
+            </a:extLst>
+          </p:cNvPr>
+          <p:cNvSpPr>
+            <a:spLocks noGrp="1"/>
+          </p:cNvSpPr>
+          <p:nvPr>
+            <p:ph type="title"/>
+          </p:nvPr>
+        </p:nvSpPr>
+        <p:spPr>
+          <a:xfrm>
+            <a:off x="162276" y="416956"/>
+            <a:ext cx="2599585" cy="1122595"/>
+          </a:xfrm>
+        </p:spPr>
+        <p:txBody>
+          <a:bodyPr anchor="t">
+            <a:noAutofit/>
+          </a:bodyPr>
+          <a:lstStyle/>
+          <a:p>
+            <a:r>
+              <a:rPr lang="tr-TR" sz="3200" dirty="0" err="1">
+                <a:latin typeface="Abadi" panose="020B0604020104020204" pitchFamily="34" charset="0"/>
+              </a:rPr>
+              <a:t>Expected</a:t>
+            </a:r>
+            <a:r>
+              <a:rPr lang="tr-TR" sz="3200" dirty="0">
+                <a:latin typeface="Abadi" panose="020B0604020104020204" pitchFamily="34" charset="0"/>
+              </a:rPr>
+              <a:t> </a:t>
+            </a:r>
+            <a:r>
+              <a:rPr lang="tr-TR" sz="3200" dirty="0" err="1">
+                <a:latin typeface="Abadi" panose="020B0604020104020204" pitchFamily="34" charset="0"/>
+              </a:rPr>
+              <a:t>Insıghts</a:t>
+            </a:r>
+            <a:endParaRPr lang="tr-TR" sz="3000" dirty="0">
+              <a:latin typeface="Abadi" panose="020B0604020104020204" pitchFamily="34" charset="0"/>
+            </a:endParaRPr>
+          </a:p>
+        </p:txBody>
+      </p:sp>
+      <p:sp>
+        <p:nvSpPr>
+          <p:cNvPr id="3" name="İçerik Yer Tutucusu 2">
+            <a:extLst>
+              <a:ext uri="{FF2B5EF4-FFF2-40B4-BE49-F238E27FC236}">
+                <a16:creationId xmlns:a16="http://schemas.microsoft.com/office/drawing/2014/main" id="{5439456B-0913-9181-D6EE-70C2D23F51E1}"/>
+              </a:ext>
+            </a:extLst>
+          </p:cNvPr>
+          <p:cNvSpPr>
+            <a:spLocks noGrp="1"/>
+          </p:cNvSpPr>
+          <p:nvPr>
+            <p:ph idx="1"/>
+          </p:nvPr>
+        </p:nvSpPr>
+        <p:spPr>
+          <a:xfrm>
+            <a:off x="2528596" y="533401"/>
+            <a:ext cx="9093428" cy="5419530"/>
+          </a:xfrm>
+        </p:spPr>
+        <p:txBody>
+          <a:bodyPr anchor="ctr">
+            <a:normAutofit/>
+          </a:bodyPr>
+          <a:lstStyle/>
+          <a:p>
+            <a:r>
+              <a:rPr lang="en-US" sz="3200" dirty="0"/>
+              <a:t>We expect to observe:</a:t>
+            </a:r>
+          </a:p>
+          <a:p>
+            <a:pPr lvl="1"/>
+            <a:r>
+              <a:rPr lang="en-US" sz="3200" dirty="0"/>
+              <a:t> decreasing success rate as map size increases</a:t>
+            </a:r>
+            <a:endParaRPr lang="tr-TR" sz="3200" dirty="0"/>
+          </a:p>
+          <a:p>
+            <a:pPr lvl="1"/>
+            <a:r>
+              <a:rPr lang="en-US" sz="3200" dirty="0"/>
+              <a:t>reduced planning performance with higher obstacle density</a:t>
+            </a:r>
+            <a:br>
+              <a:rPr lang="en-US" sz="2800" dirty="0"/>
+            </a:br>
+            <a:r>
+              <a:rPr lang="en-US" sz="2800" dirty="0"/>
+              <a:t> </a:t>
+            </a:r>
+          </a:p>
+          <a:p>
+            <a:pPr marL="0" indent="0">
+              <a:buNone/>
+            </a:pPr>
+            <a:r>
+              <a:rPr lang="en-US" sz="3200" dirty="0">
+                <a:solidFill>
+                  <a:schemeClr val="accent1"/>
+                </a:solidFill>
+              </a:rPr>
+              <a:t>This will help determine whether VIN truly learns a </a:t>
+            </a:r>
+            <a:r>
+              <a:rPr lang="en-US" sz="3200" b="1" dirty="0">
+                <a:solidFill>
+                  <a:schemeClr val="accent1"/>
+                </a:solidFill>
+              </a:rPr>
+              <a:t>generalizable planning procedure</a:t>
+            </a:r>
+            <a:r>
+              <a:rPr lang="en-US" sz="3200" dirty="0">
+                <a:solidFill>
+                  <a:schemeClr val="accent1"/>
+                </a:solidFill>
+              </a:rPr>
+              <a:t>.</a:t>
+            </a:r>
+          </a:p>
+          <a:p>
+            <a:pPr marL="0" indent="0">
+              <a:buNone/>
+            </a:pPr>
+            <a:endParaRPr lang="tr-TR" sz="3200" dirty="0"/>
+          </a:p>
+        </p:txBody>
+      </p:sp>
+    </p:spTree>
+    <p:extLst>
+      <p:ext uri="{BB962C8B-B14F-4D97-AF65-F5344CB8AC3E}">
+        <p14:creationId xmlns:p14="http://schemas.microsoft.com/office/powerpoint/2010/main" val="4149030406"/>
+      </p:ext>
+    </p:extLst>
+  </p:cSld>
+  <p:clrMapOvr>
+    <a:masterClrMapping/>
+  </p:clrMapOvr>
+</p:sld>
+</file>
+
+<file path=ppt/slides/slide13.xml><?xml version="1.0" encoding="utf-8"?>
+<p:sld xmlns:a="http://schemas.openxmlformats.org/drawingml/2006/main" xmlns:r="http://schemas.openxmlformats.org/officeDocument/2006/relationships" xmlns:p="http://schemas.openxmlformats.org/presentationml/2006/main">
+  <p:cSld>
+    <p:spTree>
+      <p:nvGrpSpPr>
+        <p:cNvPr id="1" name=""/>
+        <p:cNvGrpSpPr/>
+        <p:nvPr/>
+      </p:nvGrpSpPr>
+      <p:grpSpPr>
+        <a:xfrm>
+          <a:off x="0" y="0"/>
+          <a:ext cx="0" cy="0"/>
+          <a:chOff x="0" y="0"/>
+          <a:chExt cx="0" cy="0"/>
+        </a:xfrm>
+      </p:grpSpPr>
+      <p:sp>
+        <p:nvSpPr>
+          <p:cNvPr id="2" name="Title 1">
+            <a:extLst>
+              <a:ext uri="{FF2B5EF4-FFF2-40B4-BE49-F238E27FC236}">
+                <a16:creationId xmlns:a16="http://schemas.microsoft.com/office/drawing/2014/main" id="{EE7F00C9-B5E0-44EC-8DD3-41E9B110B5DC}"/>
+              </a:ext>
+            </a:extLst>
+          </p:cNvPr>
+          <p:cNvSpPr>
+            <a:spLocks noGrp="1"/>
+          </p:cNvSpPr>
+          <p:nvPr>
+            <p:ph type="title"/>
+          </p:nvPr>
+        </p:nvSpPr>
+        <p:spPr>
+          <a:xfrm>
+            <a:off x="1143000" y="281474"/>
+            <a:ext cx="4100804" cy="828869"/>
+          </a:xfrm>
+        </p:spPr>
+        <p:txBody>
+          <a:bodyPr/>
+          <a:lstStyle/>
+          <a:p>
+            <a:r>
+              <a:rPr lang="tr-TR" dirty="0" err="1">
+                <a:latin typeface="Abadi" panose="020B0604020104020204" pitchFamily="34" charset="0"/>
+              </a:rPr>
+              <a:t>Referances</a:t>
+            </a:r>
+            <a:endParaRPr lang="tr-TR" dirty="0">
+              <a:latin typeface="Abadi" panose="020B0604020104020204" pitchFamily="34" charset="0"/>
+            </a:endParaRPr>
+          </a:p>
+        </p:txBody>
+      </p:sp>
+      <p:sp>
+        <p:nvSpPr>
+          <p:cNvPr id="3" name="Content Placeholder 2">
+            <a:extLst>
+              <a:ext uri="{FF2B5EF4-FFF2-40B4-BE49-F238E27FC236}">
+                <a16:creationId xmlns:a16="http://schemas.microsoft.com/office/drawing/2014/main" id="{594398DC-2FF0-494F-9F47-A39BB856762C}"/>
+              </a:ext>
+            </a:extLst>
+          </p:cNvPr>
+          <p:cNvSpPr>
+            <a:spLocks noGrp="1"/>
+          </p:cNvSpPr>
+          <p:nvPr>
+            <p:ph idx="1"/>
+          </p:nvPr>
+        </p:nvSpPr>
+        <p:spPr>
+          <a:xfrm>
+            <a:off x="1035698" y="1492898"/>
+            <a:ext cx="10013302" cy="4541080"/>
+          </a:xfrm>
+        </p:spPr>
+        <p:txBody>
+          <a:bodyPr/>
+          <a:lstStyle/>
+          <a:p>
+            <a:r>
+              <a:rPr lang="tr-TR" dirty="0"/>
+              <a:t>Tamar, A., </a:t>
+            </a:r>
+            <a:r>
+              <a:rPr lang="tr-TR" dirty="0" err="1"/>
+              <a:t>Wu</a:t>
+            </a:r>
+            <a:r>
+              <a:rPr lang="tr-TR" dirty="0"/>
+              <a:t>, Y., Thomas, G., </a:t>
+            </a:r>
+            <a:r>
+              <a:rPr lang="tr-TR" dirty="0" err="1"/>
+              <a:t>Levine</a:t>
+            </a:r>
+            <a:r>
+              <a:rPr lang="tr-TR" dirty="0"/>
+              <a:t>, S., &amp; </a:t>
+            </a:r>
+            <a:r>
+              <a:rPr lang="tr-TR" dirty="0" err="1"/>
+              <a:t>Abbeel</a:t>
+            </a:r>
+            <a:r>
+              <a:rPr lang="tr-TR" dirty="0"/>
+              <a:t>, P. (2016).</a:t>
+            </a:r>
+            <a:br>
+              <a:rPr lang="tr-TR" dirty="0"/>
+            </a:br>
+            <a:r>
+              <a:rPr lang="tr-TR" dirty="0"/>
+              <a:t>Value </a:t>
+            </a:r>
+            <a:r>
+              <a:rPr lang="tr-TR" dirty="0" err="1"/>
+              <a:t>Iteration</a:t>
+            </a:r>
+            <a:r>
+              <a:rPr lang="tr-TR" dirty="0"/>
+              <a:t> Networks. </a:t>
+            </a:r>
+            <a:r>
+              <a:rPr lang="tr-TR" dirty="0" err="1"/>
+              <a:t>NeurIPS</a:t>
+            </a:r>
+            <a:r>
+              <a:rPr lang="tr-TR" dirty="0"/>
+              <a:t>.</a:t>
+            </a:r>
+          </a:p>
+          <a:p>
+            <a:r>
+              <a:rPr lang="en-US" dirty="0" err="1"/>
+              <a:t>Mnih</a:t>
+            </a:r>
+            <a:r>
+              <a:rPr lang="en-US" dirty="0"/>
+              <a:t>, V. et al. (2015).</a:t>
+            </a:r>
+            <a:br>
+              <a:rPr lang="en-US" dirty="0"/>
+            </a:br>
+            <a:r>
+              <a:rPr lang="en-US" dirty="0"/>
+              <a:t>Human-level control through deep reinforcement learning. Nature.</a:t>
+            </a:r>
+            <a:endParaRPr lang="tr-TR" dirty="0"/>
+          </a:p>
+          <a:p>
+            <a:r>
+              <a:rPr lang="en-US" dirty="0"/>
+              <a:t>Lee, L. et al. (2018).</a:t>
+            </a:r>
+            <a:br>
+              <a:rPr lang="en-US" dirty="0"/>
+            </a:br>
+            <a:r>
+              <a:rPr lang="en-US" dirty="0"/>
+              <a:t>Gated Path Planning Networks. ICML.</a:t>
+            </a:r>
+            <a:endParaRPr lang="tr-TR" dirty="0"/>
+          </a:p>
+          <a:p>
+            <a:r>
+              <a:rPr lang="tr-TR" dirty="0" err="1"/>
+              <a:t>Bellman</a:t>
+            </a:r>
+            <a:r>
+              <a:rPr lang="tr-TR" dirty="0"/>
+              <a:t>, R. (1957).</a:t>
+            </a:r>
+            <a:br>
+              <a:rPr lang="tr-TR" dirty="0"/>
+            </a:br>
+            <a:r>
+              <a:rPr lang="tr-TR" dirty="0"/>
+              <a:t>A </a:t>
+            </a:r>
+            <a:r>
+              <a:rPr lang="tr-TR" dirty="0" err="1"/>
+              <a:t>Markovian</a:t>
+            </a:r>
+            <a:r>
+              <a:rPr lang="tr-TR" dirty="0"/>
+              <a:t> </a:t>
+            </a:r>
+            <a:r>
+              <a:rPr lang="tr-TR" dirty="0" err="1"/>
+              <a:t>Decision</a:t>
+            </a:r>
+            <a:r>
+              <a:rPr lang="tr-TR" dirty="0"/>
+              <a:t> </a:t>
+            </a:r>
+            <a:r>
+              <a:rPr lang="tr-TR" dirty="0" err="1"/>
+              <a:t>Process</a:t>
+            </a:r>
+            <a:r>
+              <a:rPr lang="tr-TR" dirty="0"/>
+              <a:t>.</a:t>
+            </a:r>
+          </a:p>
+          <a:p>
+            <a:endParaRPr lang="tr-TR" dirty="0"/>
+          </a:p>
+        </p:txBody>
+      </p:sp>
+    </p:spTree>
+    <p:extLst>
+      <p:ext uri="{BB962C8B-B14F-4D97-AF65-F5344CB8AC3E}">
+        <p14:creationId xmlns:p14="http://schemas.microsoft.com/office/powerpoint/2010/main" val="4228595668"/>
+      </p:ext>
+    </p:extLst>
+  </p:cSld>
+  <p:clrMapOvr>
+    <a:masterClrMapping/>
+  </p:clrMapOvr>
+</p:sld>
+</file>
+
 <file path=ppt/slides/slide2.xml><?xml version="1.0" encoding="utf-8"?>
 <p:sld xmlns:a="http://schemas.openxmlformats.org/drawingml/2006/main" xmlns:r="http://schemas.openxmlformats.org/officeDocument/2006/relationships" xmlns:p="http://schemas.openxmlformats.org/presentationml/2006/main">
   <p:cSld>
@@ -8973,53 +12195,53 @@
             </a:r>
             <a:r>
               <a:rPr lang="tr-TR" dirty="0">
-                <a:hlinkClick r:id="rId2"/>
+                <a:hlinkClick r:id="rId3"/>
               </a:rPr>
               <a:t>link </a:t>
-            </a:r>
-            <a:r>
-              <a:rPr lang="tr-TR" dirty="0" err="1">
-                <a:hlinkClick r:id="rId2"/>
-              </a:rPr>
-              <a:t>to</a:t>
-            </a:r>
-            <a:r>
-              <a:rPr lang="tr-TR" dirty="0">
-                <a:hlinkClick r:id="rId2"/>
-              </a:rPr>
-              <a:t> </a:t>
-            </a:r>
-            <a:r>
-              <a:rPr lang="tr-TR" dirty="0" err="1">
-                <a:hlinkClick r:id="rId2"/>
-              </a:rPr>
-              <a:t>the</a:t>
-            </a:r>
-            <a:r>
-              <a:rPr lang="tr-TR" dirty="0">
-                <a:hlinkClick r:id="rId2"/>
-              </a:rPr>
-              <a:t> </a:t>
-            </a:r>
-            <a:r>
-              <a:rPr lang="tr-TR" dirty="0" err="1">
-                <a:hlinkClick r:id="rId2"/>
-              </a:rPr>
-              <a:t>paper</a:t>
-            </a:r>
-            <a:r>
-              <a:rPr lang="tr-TR" dirty="0"/>
-              <a:t>) (</a:t>
             </a:r>
             <a:r>
               <a:rPr lang="tr-TR" dirty="0" err="1">
                 <a:hlinkClick r:id="rId3"/>
               </a:rPr>
-              <a:t>github</a:t>
+              <a:t>to</a:t>
             </a:r>
             <a:r>
               <a:rPr lang="tr-TR" dirty="0">
                 <a:hlinkClick r:id="rId3"/>
+              </a:rPr>
+              <a:t> </a:t>
+            </a:r>
+            <a:r>
+              <a:rPr lang="tr-TR" dirty="0" err="1">
+                <a:hlinkClick r:id="rId3"/>
+              </a:rPr>
+              <a:t>the</a:t>
+            </a:r>
+            <a:r>
+              <a:rPr lang="tr-TR" dirty="0">
+                <a:hlinkClick r:id="rId3"/>
+              </a:rPr>
+              <a:t> </a:t>
+            </a:r>
+            <a:r>
+              <a:rPr lang="tr-TR" dirty="0" err="1">
+                <a:hlinkClick r:id="rId3"/>
+              </a:rPr>
+              <a:t>paper</a:t>
+            </a:r>
+            <a:r>
+              <a:rPr lang="tr-TR" dirty="0"/>
+              <a:t>) (</a:t>
+            </a:r>
+            <a:r>
+              <a:rPr lang="tr-TR" dirty="0" err="1">
+                <a:hlinkClick r:id="rId4"/>
+              </a:rPr>
+              <a:t>github</a:t>
+            </a:r>
+            <a:r>
+              <a:rPr lang="tr-TR" dirty="0">
+                <a:hlinkClick r:id="rId4"/>
               </a:rPr>
               <a:t> link</a:t>
             </a:r>
@@ -9620,7 +12842,7 @@
           </p:nvPr>
         </p:nvPicPr>
         <p:blipFill>
-          <a:blip r:embed="rId2"/>
+          <a:blip r:embed="rId3"/>
           <a:stretch>
             <a:fillRect/>
           </a:stretch>
@@ -11810,12 +15032,25 @@
             <p:ph type="title"/>
           </p:nvPr>
         </p:nvSpPr>
-        <p:spPr/>
+        <p:spPr>
+          <a:xfrm>
+            <a:off x="181947" y="0"/>
+            <a:ext cx="9906000" cy="856713"/>
+          </a:xfrm>
+        </p:spPr>
         <p:txBody>
           <a:bodyPr/>
           <a:lstStyle/>
           <a:p>
-            <a:endParaRPr lang="tr-TR"/>
+            <a:r>
+              <a:rPr lang="tr-TR" dirty="0" err="1">
+                <a:latin typeface="Abadi" panose="020B0604020104020204" pitchFamily="34" charset="0"/>
+              </a:rPr>
+              <a:t>Reproductıon</a:t>
+            </a:r>
+            <a:endParaRPr lang="tr-TR" dirty="0">
+              <a:latin typeface="Abadi" panose="020B0604020104020204" pitchFamily="34" charset="0"/>
+            </a:endParaRPr>
           </a:p>
         </p:txBody>
       </p:sp>
@@ -11835,12 +15070,495 @@
             <p:ph idx="1"/>
           </p:nvPr>
         </p:nvSpPr>
-        <p:spPr/>
+        <p:spPr>
+          <a:xfrm>
+            <a:off x="360006" y="798410"/>
+            <a:ext cx="11471988" cy="676060"/>
+          </a:xfrm>
+        </p:spPr>
         <p:txBody>
-          <a:bodyPr/>
+          <a:bodyPr>
+            <a:normAutofit fontScale="62500" lnSpcReduction="20000"/>
+          </a:bodyPr>
           <a:lstStyle/>
           <a:p>
-            <a:endParaRPr lang="tr-TR"/>
+            <a:pPr marL="0" indent="0">
+              <a:buNone/>
+            </a:pPr>
+            <a:r>
+              <a:rPr lang="tr-TR" sz="3600" dirty="0"/>
+              <a:t>T</a:t>
+            </a:r>
+            <a:r>
+              <a:rPr lang="en-US" sz="3600" dirty="0"/>
+              <a:t>he </a:t>
+            </a:r>
+            <a:r>
+              <a:rPr lang="tr-TR" sz="3600" dirty="0" err="1"/>
+              <a:t>key</a:t>
+            </a:r>
+            <a:r>
+              <a:rPr lang="tr-TR" sz="3600" dirty="0"/>
+              <a:t> </a:t>
+            </a:r>
+            <a:r>
+              <a:rPr lang="tr-TR" sz="3600" dirty="0" err="1"/>
+              <a:t>results</a:t>
+            </a:r>
+            <a:r>
+              <a:rPr lang="tr-TR" sz="3600" dirty="0"/>
+              <a:t> of </a:t>
+            </a:r>
+            <a:r>
+              <a:rPr lang="en-US" sz="3600" dirty="0"/>
+              <a:t> VIN experiments on </a:t>
+            </a:r>
+            <a:r>
+              <a:rPr lang="en-US" sz="3600" dirty="0" err="1"/>
+              <a:t>gridworld</a:t>
+            </a:r>
+            <a:r>
+              <a:rPr lang="en-US" sz="3600" dirty="0"/>
+              <a:t> planning tasks</a:t>
+            </a:r>
+            <a:r>
+              <a:rPr lang="tr-TR" sz="3600" dirty="0"/>
+              <a:t> </a:t>
+            </a:r>
+            <a:r>
+              <a:rPr lang="tr-TR" sz="3600" dirty="0" err="1"/>
+              <a:t>will</a:t>
+            </a:r>
+            <a:r>
+              <a:rPr lang="tr-TR" sz="3600" dirty="0"/>
+              <a:t> be </a:t>
+            </a:r>
+            <a:r>
+              <a:rPr lang="tr-TR" sz="3600" dirty="0" err="1"/>
+              <a:t>reproduced</a:t>
+            </a:r>
+            <a:r>
+              <a:rPr lang="tr-TR" sz="3600" dirty="0"/>
+              <a:t> </a:t>
+            </a:r>
+            <a:r>
+              <a:rPr lang="tr-TR" sz="3600" dirty="0" err="1"/>
+              <a:t>by</a:t>
+            </a:r>
+            <a:r>
+              <a:rPr lang="tr-TR" sz="3600" dirty="0"/>
+              <a:t> </a:t>
+            </a:r>
+            <a:r>
+              <a:rPr lang="tr-TR" sz="3600" dirty="0" err="1"/>
+              <a:t>using</a:t>
+            </a:r>
+            <a:r>
+              <a:rPr lang="tr-TR" sz="3600" dirty="0"/>
+              <a:t> </a:t>
+            </a:r>
+            <a:r>
+              <a:rPr lang="tr-TR" sz="3600" dirty="0" err="1"/>
+              <a:t>pytorch</a:t>
+            </a:r>
+            <a:r>
+              <a:rPr lang="tr-TR" sz="3600" dirty="0"/>
+              <a:t> </a:t>
+            </a:r>
+            <a:r>
+              <a:rPr lang="tr-TR" sz="3600" dirty="0" err="1"/>
+              <a:t>implementation</a:t>
+            </a:r>
+            <a:r>
+              <a:rPr lang="tr-TR" sz="3600" dirty="0"/>
+              <a:t> (</a:t>
+            </a:r>
+            <a:r>
+              <a:rPr lang="tr-TR" sz="3600" dirty="0" err="1">
+                <a:hlinkClick r:id="rId3"/>
+              </a:rPr>
+              <a:t>github</a:t>
+            </a:r>
+            <a:r>
+              <a:rPr lang="tr-TR" sz="3600" dirty="0">
+                <a:hlinkClick r:id="rId3"/>
+              </a:rPr>
+              <a:t> link</a:t>
+            </a:r>
+            <a:r>
+              <a:rPr lang="tr-TR" sz="3600" dirty="0"/>
+              <a:t>).</a:t>
+            </a:r>
+            <a:endParaRPr lang="en-US" sz="3600" dirty="0"/>
+          </a:p>
+          <a:p>
+            <a:endParaRPr lang="tr-TR" dirty="0"/>
+          </a:p>
+        </p:txBody>
+      </p:sp>
+      <p:pic>
+        <p:nvPicPr>
+          <p:cNvPr id="4" name="Picture 3">
+            <a:extLst>
+              <a:ext uri="{FF2B5EF4-FFF2-40B4-BE49-F238E27FC236}">
+                <a16:creationId xmlns:a16="http://schemas.microsoft.com/office/drawing/2014/main" id="{5975AAAA-1A12-4380-B486-EBDE6DC7FACF}"/>
+              </a:ext>
+            </a:extLst>
+          </p:cNvPr>
+          <p:cNvPicPr>
+            <a:picLocks noChangeAspect="1"/>
+          </p:cNvPicPr>
+          <p:nvPr/>
+        </p:nvPicPr>
+        <p:blipFill>
+          <a:blip r:embed="rId4"/>
+          <a:stretch>
+            <a:fillRect/>
+          </a:stretch>
+        </p:blipFill>
+        <p:spPr>
+          <a:xfrm>
+            <a:off x="181947" y="1609024"/>
+            <a:ext cx="4459254" cy="1826277"/>
+          </a:xfrm>
+          <a:prstGeom prst="rect">
+            <a:avLst/>
+          </a:prstGeom>
+        </p:spPr>
+      </p:pic>
+      <p:sp>
+        <p:nvSpPr>
+          <p:cNvPr id="5" name="TextBox 4">
+            <a:extLst>
+              <a:ext uri="{FF2B5EF4-FFF2-40B4-BE49-F238E27FC236}">
+                <a16:creationId xmlns:a16="http://schemas.microsoft.com/office/drawing/2014/main" id="{B1B15EB5-250C-48E3-AB85-8B842B49D0C2}"/>
+              </a:ext>
+            </a:extLst>
+          </p:cNvPr>
+          <p:cNvSpPr txBox="1"/>
+          <p:nvPr/>
+        </p:nvSpPr>
+        <p:spPr>
+          <a:xfrm>
+            <a:off x="61328" y="3410111"/>
+            <a:ext cx="5073619" cy="400110"/>
+          </a:xfrm>
+          <a:prstGeom prst="rect">
+            <a:avLst/>
+          </a:prstGeom>
+          <a:noFill/>
+        </p:spPr>
+        <p:txBody>
+          <a:bodyPr wrap="square" rtlCol="0">
+            <a:spAutoFit/>
+          </a:bodyPr>
+          <a:lstStyle/>
+          <a:p>
+            <a:r>
+              <a:rPr lang="en-US" sz="2000" b="1" dirty="0"/>
+              <a:t>Figure 3</a:t>
+            </a:r>
+            <a:r>
+              <a:rPr lang="en-US" sz="2000" dirty="0"/>
+              <a:t>: Visualization of predicted vs optimal paths</a:t>
+            </a:r>
+            <a:endParaRPr lang="tr-TR" sz="2000" dirty="0"/>
+          </a:p>
+        </p:txBody>
+      </p:sp>
+      <p:pic>
+        <p:nvPicPr>
+          <p:cNvPr id="6" name="Picture 5">
+            <a:extLst>
+              <a:ext uri="{FF2B5EF4-FFF2-40B4-BE49-F238E27FC236}">
+                <a16:creationId xmlns:a16="http://schemas.microsoft.com/office/drawing/2014/main" id="{57FBDF55-515F-4581-86BD-8BC544E41117}"/>
+              </a:ext>
+            </a:extLst>
+          </p:cNvPr>
+          <p:cNvPicPr>
+            <a:picLocks noChangeAspect="1"/>
+          </p:cNvPicPr>
+          <p:nvPr/>
+        </p:nvPicPr>
+        <p:blipFill>
+          <a:blip r:embed="rId5"/>
+          <a:stretch>
+            <a:fillRect/>
+          </a:stretch>
+        </p:blipFill>
+        <p:spPr>
+          <a:xfrm>
+            <a:off x="5378417" y="1682037"/>
+            <a:ext cx="6361980" cy="1630334"/>
+          </a:xfrm>
+          <a:prstGeom prst="rect">
+            <a:avLst/>
+          </a:prstGeom>
+        </p:spPr>
+      </p:pic>
+      <p:sp>
+        <p:nvSpPr>
+          <p:cNvPr id="7" name="TextBox 6">
+            <a:extLst>
+              <a:ext uri="{FF2B5EF4-FFF2-40B4-BE49-F238E27FC236}">
+                <a16:creationId xmlns:a16="http://schemas.microsoft.com/office/drawing/2014/main" id="{3706D720-1D50-4FD7-A2E9-B63204B8069F}"/>
+              </a:ext>
+            </a:extLst>
+          </p:cNvPr>
+          <p:cNvSpPr txBox="1"/>
+          <p:nvPr/>
+        </p:nvSpPr>
+        <p:spPr>
+          <a:xfrm>
+            <a:off x="5602351" y="3340677"/>
+            <a:ext cx="6407701" cy="400110"/>
+          </a:xfrm>
+          <a:prstGeom prst="rect">
+            <a:avLst/>
+          </a:prstGeom>
+          <a:noFill/>
+        </p:spPr>
+        <p:txBody>
+          <a:bodyPr wrap="square" rtlCol="0">
+            <a:spAutoFit/>
+          </a:bodyPr>
+          <a:lstStyle/>
+          <a:p>
+            <a:r>
+              <a:rPr lang="tr-TR" sz="2000" b="1" dirty="0" err="1"/>
+              <a:t>Table</a:t>
+            </a:r>
+            <a:r>
+              <a:rPr lang="tr-TR" sz="2000" b="1" dirty="0"/>
+              <a:t> 1</a:t>
+            </a:r>
+            <a:r>
+              <a:rPr lang="tr-TR" sz="2000" dirty="0"/>
+              <a:t>: </a:t>
+            </a:r>
+            <a:r>
+              <a:rPr lang="tr-TR" sz="2000" dirty="0" err="1"/>
+              <a:t>Quantitative</a:t>
+            </a:r>
+            <a:r>
+              <a:rPr lang="tr-TR" sz="2000" dirty="0"/>
+              <a:t> </a:t>
+            </a:r>
+            <a:r>
+              <a:rPr lang="tr-TR" sz="2000" dirty="0" err="1"/>
+              <a:t>performance</a:t>
+            </a:r>
+            <a:r>
+              <a:rPr lang="tr-TR" sz="2000" dirty="0"/>
+              <a:t> </a:t>
+            </a:r>
+            <a:r>
+              <a:rPr lang="tr-TR" sz="2000" dirty="0" err="1"/>
+              <a:t>comparison</a:t>
+            </a:r>
+            <a:endParaRPr lang="tr-TR" sz="2000" dirty="0"/>
+          </a:p>
+        </p:txBody>
+      </p:sp>
+      <p:sp>
+        <p:nvSpPr>
+          <p:cNvPr id="8" name="TextBox 7">
+            <a:extLst>
+              <a:ext uri="{FF2B5EF4-FFF2-40B4-BE49-F238E27FC236}">
+                <a16:creationId xmlns:a16="http://schemas.microsoft.com/office/drawing/2014/main" id="{C84E74F4-ADD3-4BA5-AAB4-37434ACC8BF1}"/>
+              </a:ext>
+            </a:extLst>
+          </p:cNvPr>
+          <p:cNvSpPr txBox="1"/>
+          <p:nvPr/>
+        </p:nvSpPr>
+        <p:spPr>
+          <a:xfrm>
+            <a:off x="414822" y="3900200"/>
+            <a:ext cx="4336402" cy="2062103"/>
+          </a:xfrm>
+          <a:prstGeom prst="rect">
+            <a:avLst/>
+          </a:prstGeom>
+          <a:noFill/>
+        </p:spPr>
+        <p:txBody>
+          <a:bodyPr wrap="square" rtlCol="0">
+            <a:spAutoFit/>
+          </a:bodyPr>
+          <a:lstStyle/>
+          <a:p>
+            <a:r>
+              <a:rPr lang="en-US" sz="2200" dirty="0"/>
+              <a:t>Shows qualitative comparison between:</a:t>
+            </a:r>
+          </a:p>
+          <a:p>
+            <a:pPr marL="742950" lvl="1" indent="-285750">
+              <a:buFont typeface="Arial" panose="020B0604020202020204" pitchFamily="34" charset="0"/>
+              <a:buChar char="•"/>
+            </a:pPr>
+            <a:r>
+              <a:rPr lang="en-US" sz="2200" dirty="0"/>
+              <a:t>optimal path (ground truth)</a:t>
+            </a:r>
+          </a:p>
+          <a:p>
+            <a:pPr marL="742950" lvl="1" indent="-285750">
+              <a:buFont typeface="Arial" panose="020B0604020202020204" pitchFamily="34" charset="0"/>
+              <a:buChar char="•"/>
+            </a:pPr>
+            <a:r>
+              <a:rPr lang="en-US" sz="2200" dirty="0"/>
+              <a:t>VIN predicted path</a:t>
+            </a:r>
+          </a:p>
+          <a:p>
+            <a:r>
+              <a:rPr lang="en-US" sz="2200" dirty="0"/>
+              <a:t>→ verifies that VIN learns meaningful planning behavior</a:t>
+            </a:r>
+          </a:p>
+          <a:p>
+            <a:endParaRPr lang="tr-TR" dirty="0"/>
+          </a:p>
+        </p:txBody>
+      </p:sp>
+      <p:sp>
+        <p:nvSpPr>
+          <p:cNvPr id="9" name="Rectangle 8">
+            <a:extLst>
+              <a:ext uri="{FF2B5EF4-FFF2-40B4-BE49-F238E27FC236}">
+                <a16:creationId xmlns:a16="http://schemas.microsoft.com/office/drawing/2014/main" id="{452633DF-66E1-4C63-9E46-522C64E10C55}"/>
+              </a:ext>
+            </a:extLst>
+          </p:cNvPr>
+          <p:cNvSpPr/>
+          <p:nvPr/>
+        </p:nvSpPr>
+        <p:spPr>
+          <a:xfrm>
+            <a:off x="6294278" y="3900200"/>
+            <a:ext cx="3138970" cy="1107996"/>
+          </a:xfrm>
+          <a:prstGeom prst="rect">
+            <a:avLst/>
+          </a:prstGeom>
+        </p:spPr>
+        <p:txBody>
+          <a:bodyPr wrap="square">
+            <a:spAutoFit/>
+          </a:bodyPr>
+          <a:lstStyle/>
+          <a:p>
+            <a:r>
+              <a:rPr lang="tr-TR" sz="2200" dirty="0" err="1"/>
+              <a:t>Reports</a:t>
+            </a:r>
+            <a:r>
+              <a:rPr lang="tr-TR" sz="2200" dirty="0"/>
+              <a:t> </a:t>
+            </a:r>
+            <a:r>
+              <a:rPr lang="tr-TR" sz="2200" dirty="0" err="1"/>
+              <a:t>quantitative</a:t>
+            </a:r>
+            <a:r>
+              <a:rPr lang="tr-TR" sz="2200" dirty="0"/>
+              <a:t> </a:t>
+            </a:r>
+            <a:r>
+              <a:rPr lang="tr-TR" sz="2200" dirty="0" err="1"/>
+              <a:t>metrics</a:t>
+            </a:r>
+            <a:r>
+              <a:rPr lang="tr-TR" sz="2200" dirty="0"/>
+              <a:t>:</a:t>
+            </a:r>
+          </a:p>
+          <a:p>
+            <a:pPr>
+              <a:buFont typeface="Arial" panose="020B0604020202020204" pitchFamily="34" charset="0"/>
+              <a:buChar char="•"/>
+            </a:pPr>
+            <a:r>
+              <a:rPr lang="tr-TR" sz="2200" dirty="0"/>
+              <a:t> </a:t>
+            </a:r>
+            <a:r>
+              <a:rPr lang="tr-TR" sz="2200" dirty="0" err="1"/>
+              <a:t>success</a:t>
+            </a:r>
+            <a:r>
+              <a:rPr lang="tr-TR" sz="2200" dirty="0"/>
+              <a:t> rate</a:t>
+            </a:r>
+          </a:p>
+          <a:p>
+            <a:pPr>
+              <a:buFont typeface="Arial" panose="020B0604020202020204" pitchFamily="34" charset="0"/>
+              <a:buChar char="•"/>
+            </a:pPr>
+            <a:r>
+              <a:rPr lang="tr-TR" sz="2200" dirty="0"/>
+              <a:t> </a:t>
+            </a:r>
+            <a:r>
+              <a:rPr lang="tr-TR" sz="2200" dirty="0" err="1"/>
+              <a:t>path</a:t>
+            </a:r>
+            <a:r>
+              <a:rPr lang="tr-TR" sz="2200" dirty="0"/>
+              <a:t> </a:t>
+            </a:r>
+            <a:r>
+              <a:rPr lang="tr-TR" sz="2200" dirty="0" err="1"/>
+              <a:t>optimality</a:t>
+            </a:r>
+            <a:endParaRPr lang="tr-TR" sz="2200" dirty="0"/>
+          </a:p>
+        </p:txBody>
+      </p:sp>
+      <p:sp>
+        <p:nvSpPr>
+          <p:cNvPr id="10" name="Rectangle 9">
+            <a:extLst>
+              <a:ext uri="{FF2B5EF4-FFF2-40B4-BE49-F238E27FC236}">
+                <a16:creationId xmlns:a16="http://schemas.microsoft.com/office/drawing/2014/main" id="{E41859E2-6B49-458D-9DF7-EEC1FF94CE13}"/>
+              </a:ext>
+            </a:extLst>
+          </p:cNvPr>
+          <p:cNvSpPr/>
+          <p:nvPr/>
+        </p:nvSpPr>
+        <p:spPr>
+          <a:xfrm>
+            <a:off x="674721" y="6011418"/>
+            <a:ext cx="11239113" cy="446276"/>
+          </a:xfrm>
+          <a:prstGeom prst="rect">
+            <a:avLst/>
+          </a:prstGeom>
+        </p:spPr>
+        <p:txBody>
+          <a:bodyPr wrap="square">
+            <a:spAutoFit/>
+          </a:bodyPr>
+          <a:lstStyle/>
+          <a:p>
+            <a:r>
+              <a:rPr lang="en-US" sz="2300" b="1" dirty="0">
+                <a:solidFill>
+                  <a:schemeClr val="accent1"/>
+                </a:solidFill>
+              </a:rPr>
+              <a:t>These results will serve as the baseline for evaluating the generalization and robustness experiments.</a:t>
+            </a:r>
+            <a:endParaRPr lang="tr-TR" sz="2300" b="1" dirty="0">
+              <a:solidFill>
+                <a:schemeClr val="accent1"/>
+              </a:solidFill>
+            </a:endParaRPr>
           </a:p>
         </p:txBody>
       </p:sp>
@@ -12056,4 +15774,299 @@
     </a:ext>
   </a:extLst>
 </a:theme>
+</file>
+
+<file path=ppt/theme/theme2.xml><?xml version="1.0" encoding="utf-8"?>
+<a:theme xmlns:a="http://schemas.openxmlformats.org/drawingml/2006/main" name="Office Theme">
+  <a:themeElements>
+    <a:clrScheme name="Office">
+      <a:dk1>
+        <a:sysClr val="windowText" lastClr="000000"/>
+      </a:dk1>
+      <a:lt1>
+        <a:sysClr val="window" lastClr="FFFFFF"/>
+      </a:lt1>
+      <a:dk2>
+        <a:srgbClr val="44546A"/>
+      </a:dk2>
+      <a:lt2>
+        <a:srgbClr val="E7E6E6"/>
+      </a:lt2>
+      <a:accent1>
+        <a:srgbClr val="4472C4"/>
+      </a:accent1>
+      <a:accent2>
+        <a:srgbClr val="ED7D31"/>
+      </a:accent2>
+      <a:accent3>
+        <a:srgbClr val="A5A5A5"/>
+      </a:accent3>
+      <a:accent4>
+        <a:srgbClr val="FFC000"/>
+      </a:accent4>
+      <a:accent5>
+        <a:srgbClr val="5B9BD5"/>
+      </a:accent5>
+      <a:accent6>
+        <a:srgbClr val="70AD47"/>
+      </a:accent6>
+      <a:hlink>
+        <a:srgbClr val="0563C1"/>
+      </a:hlink>
+      <a:folHlink>
+        <a:srgbClr val="954F72"/>
+      </a:folHlink>
+    </a:clrScheme>
+    <a:fontScheme name="Office">
+      <a:majorFont>
+        <a:latin typeface="Calibri Light" panose="020F0302020204030204"/>
+        <a:ea typeface=""/>
+        <a:cs typeface=""/>
+        <a:font script="Jpan" typeface="游ゴシック Light"/>
+        <a:font script="Hang" typeface="맑은 고딕"/>
+        <a:font script="Hans" typeface="等线 Light"/>
+        <a:font script="Hant" typeface="新細明體"/>
+        <a:font script="Arab" typeface="Times New Roman"/>
+        <a:font script="Hebr" typeface="Times New Roman"/>
+        <a:font script="Thai" typeface="Angsana New"/>
+        <a:font script="Ethi" typeface="Nyala"/>
+        <a:font script="Beng" typeface="Vrinda"/>
+        <a:font script="Gujr" typeface="Shruti"/>
+        <a:font script="Khmr" typeface="MoolBoran"/>
+        <a:font script="Knda" typeface="Tunga"/>
+        <a:font script="Guru" typeface="Raavi"/>
+        <a:font script="Cans" typeface="Euphemia"/>
+        <a:font script="Cher" typeface="Plantagenet Cherokee"/>
+        <a:font script="Yiii" typeface="Microsoft Yi Baiti"/>
+        <a:font script="Tibt" typeface="Microsoft Himalaya"/>
+        <a:font script="Thaa" typeface="MV Boli"/>
+        <a:font script="Deva" typeface="Mangal"/>
+        <a:font script="Telu" typeface="Gautami"/>
+        <a:font script="Taml" typeface="Latha"/>
+        <a:font script="Syrc" typeface="Estrangelo Edessa"/>
+        <a:font script="Orya" typeface="Kalinga"/>
+        <a:font script="Mlym" typeface="Kartika"/>
+        <a:font script="Laoo" typeface="DokChampa"/>
+        <a:font script="Sinh" typeface="Iskoola Pota"/>
+        <a:font script="Mong" typeface="Mongolian Baiti"/>
+        <a:font script="Viet" typeface="Times New Roman"/>
+        <a:font script="Uigh" typeface="Microsoft Uighur"/>
+        <a:font script="Geor" typeface="Sylfaen"/>
+        <a:font script="Armn" typeface="Arial"/>
+        <a:font script="Bugi" typeface="Leelawadee UI"/>
+        <a:font script="Bopo" typeface="Microsoft JhengHei"/>
+        <a:font script="Java" typeface="Javanese Text"/>
+        <a:font script="Lisu" typeface="Segoe UI"/>
+        <a:font script="Mymr" typeface="Myanmar Text"/>
+        <a:font script="Nkoo" typeface="Ebrima"/>
+        <a:font script="Olck" typeface="Nirmala UI"/>
+        <a:font script="Osma" typeface="Ebrima"/>
+        <a:font script="Phag" typeface="Phagspa"/>
+        <a:font script="Syrn" typeface="Estrangelo Edessa"/>
+        <a:font script="Syrj" typeface="Estrangelo Edessa"/>
+        <a:font script="Syre" typeface="Estrangelo Edessa"/>
+        <a:font script="Sora" typeface="Nirmala UI"/>
+        <a:font script="Tale" typeface="Microsoft Tai Le"/>
+        <a:font script="Talu" typeface="Microsoft New Tai Lue"/>
+        <a:font script="Tfng" typeface="Ebrima"/>
+      </a:majorFont>
+      <a:minorFont>
+        <a:latin typeface="Calibri" panose="020F0502020204030204"/>
+        <a:ea typeface=""/>
+        <a:cs typeface=""/>
+        <a:font script="Jpan" typeface="游ゴシック"/>
+        <a:font script="Hang" typeface="맑은 고딕"/>
+        <a:font script="Hans" typeface="等线"/>
+        <a:font script="Hant" typeface="新細明體"/>
+        <a:font script="Arab" typeface="Arial"/>
+        <a:font script="Hebr" typeface="Arial"/>
+        <a:font script="Thai" typeface="Cordia New"/>
+        <a:font script="Ethi" typeface="Nyala"/>
+        <a:font script="Beng" typeface="Vrinda"/>
+        <a:font script="Gujr" typeface="Shruti"/>
+        <a:font script="Khmr" typeface="DaunPenh"/>
+        <a:font script="Knda" typeface="Tunga"/>
+        <a:font script="Guru" typeface="Raavi"/>
+        <a:font script="Cans" typeface="Euphemia"/>
+        <a:font script="Cher" typeface="Plantagenet Cherokee"/>
+        <a:font script="Yiii" typeface="Microsoft Yi Baiti"/>
+        <a:font script="Tibt" typeface="Microsoft Himalaya"/>
+        <a:font script="Thaa" typeface="MV Boli"/>
+        <a:font script="Deva" typeface="Mangal"/>
+        <a:font script="Telu" typeface="Gautami"/>
+        <a:font script="Taml" typeface="Latha"/>
+        <a:font script="Syrc" typeface="Estrangelo Edessa"/>
+        <a:font script="Orya" typeface="Kalinga"/>
+        <a:font script="Mlym" typeface="Kartika"/>
+        <a:font script="Laoo" typeface="DokChampa"/>
+        <a:font script="Sinh" typeface="Iskoola Pota"/>
+        <a:font script="Mong" typeface="Mongolian Baiti"/>
+        <a:font script="Viet" typeface="Arial"/>
+        <a:font script="Uigh" typeface="Microsoft Uighur"/>
+        <a:font script="Geor" typeface="Sylfaen"/>
+        <a:font script="Armn" typeface="Arial"/>
+        <a:font script="Bugi" typeface="Leelawadee UI"/>
+        <a:font script="Bopo" typeface="Microsoft JhengHei"/>
+        <a:font script="Java" typeface="Javanese Text"/>
+        <a:font script="Lisu" typeface="Segoe UI"/>
+        <a:font script="Mymr" typeface="Myanmar Text"/>
+        <a:font script="Nkoo" typeface="Ebrima"/>
+        <a:font script="Olck" typeface="Nirmala UI"/>
+        <a:font script="Osma" typeface="Ebrima"/>
+        <a:font script="Phag" typeface="Phagspa"/>
+        <a:font script="Syrn" typeface="Estrangelo Edessa"/>
+        <a:font script="Syrj" typeface="Estrangelo Edessa"/>
+        <a:font script="Syre" typeface="Estrangelo Edessa"/>
+        <a:font script="Sora" typeface="Nirmala UI"/>
+        <a:font script="Tale" typeface="Microsoft Tai Le"/>
+        <a:font script="Talu" typeface="Microsoft New Tai Lue"/>
+        <a:font script="Tfng" typeface="Ebrima"/>
+      </a:minorFont>
+    </a:fontScheme>
+    <a:fmtScheme name="Office">
+      <a:fillStyleLst>
+        <a:solidFill>
+          <a:schemeClr val="phClr"/>
+        </a:solidFill>
+        <a:gradFill rotWithShape="1">
+          <a:gsLst>
+            <a:gs pos="0">
+              <a:schemeClr val="phClr">
+                <a:lumMod val="110000"/>
+                <a:satMod val="105000"/>
+                <a:tint val="67000"/>
+              </a:schemeClr>
+            </a:gs>
+            <a:gs pos="50000">
+              <a:schemeClr val="phClr">
+                <a:lumMod val="105000"/>
+                <a:satMod val="103000"/>
+                <a:tint val="73000"/>
+              </a:schemeClr>
+            </a:gs>
+            <a:gs pos="100000">
+              <a:schemeClr val="phClr">
+                <a:lumMod val="105000"/>
+                <a:satMod val="109000"/>
+                <a:tint val="81000"/>
+              </a:schemeClr>
+            </a:gs>
+          </a:gsLst>
+          <a:lin ang="5400000" scaled="0"/>
+        </a:gradFill>
+        <a:gradFill rotWithShape="1">
+          <a:gsLst>
+            <a:gs pos="0">
+              <a:schemeClr val="phClr">
+                <a:satMod val="103000"/>
+                <a:lumMod val="102000"/>
+                <a:tint val="94000"/>
+              </a:schemeClr>
+            </a:gs>
+            <a:gs pos="50000">
+              <a:schemeClr val="phClr">
+                <a:satMod val="110000"/>
+                <a:lumMod val="100000"/>
+                <a:shade val="100000"/>
+              </a:schemeClr>
+            </a:gs>
+            <a:gs pos="100000">
+              <a:schemeClr val="phClr">
+                <a:lumMod val="99000"/>
+                <a:satMod val="120000"/>
+                <a:shade val="78000"/>
+              </a:schemeClr>
+            </a:gs>
+          </a:gsLst>
+          <a:lin ang="5400000" scaled="0"/>
+        </a:gradFill>
+      </a:fillStyleLst>
+      <a:lnStyleLst>
+        <a:ln w="6350" cap="flat" cmpd="sng" algn="ctr">
+          <a:solidFill>
+            <a:schemeClr val="phClr"/>
+          </a:solidFill>
+          <a:prstDash val="solid"/>
+          <a:miter lim="800000"/>
+        </a:ln>
+        <a:ln w="12700" cap="flat" cmpd="sng" algn="ctr">
+          <a:solidFill>
+            <a:schemeClr val="phClr"/>
+          </a:solidFill>
+          <a:prstDash val="solid"/>
+          <a:miter lim="800000"/>
+        </a:ln>
+        <a:ln w="19050" cap="flat" cmpd="sng" algn="ctr">
+          <a:solidFill>
+            <a:schemeClr val="phClr"/>
+          </a:solidFill>
+          <a:prstDash val="solid"/>
+          <a:miter lim="800000"/>
+        </a:ln>
+      </a:lnStyleLst>
+      <a:effectStyleLst>
+        <a:effectStyle>
+          <a:effectLst/>
+        </a:effectStyle>
+        <a:effectStyle>
+          <a:effectLst/>
+        </a:effectStyle>
+        <a:effectStyle>
+          <a:effectLst>
+            <a:outerShdw blurRad="57150" dist="19050" dir="5400000" algn="ctr" rotWithShape="0">
+              <a:srgbClr val="000000">
+                <a:alpha val="63000"/>
+              </a:srgbClr>
+            </a:outerShdw>
+          </a:effectLst>
+        </a:effectStyle>
+      </a:effectStyleLst>
+      <a:bgFillStyleLst>
+        <a:solidFill>
+          <a:schemeClr val="phClr"/>
+        </a:solidFill>
+        <a:solidFill>
+          <a:schemeClr val="phClr">
+            <a:tint val="95000"/>
+            <a:satMod val="170000"/>
+          </a:schemeClr>
+        </a:solidFill>
+        <a:gradFill rotWithShape="1">
+          <a:gsLst>
+            <a:gs pos="0">
+              <a:schemeClr val="phClr">
+                <a:tint val="93000"/>
+                <a:satMod val="150000"/>
+                <a:shade val="98000"/>
+                <a:lumMod val="102000"/>
+              </a:schemeClr>
+            </a:gs>
+            <a:gs pos="50000">
+              <a:schemeClr val="phClr">
+                <a:tint val="98000"/>
+                <a:satMod val="130000"/>
+                <a:shade val="90000"/>
+                <a:lumMod val="103000"/>
+              </a:schemeClr>
+            </a:gs>
+            <a:gs pos="100000">
+              <a:schemeClr val="phClr">
+                <a:shade val="63000"/>
+                <a:satMod val="120000"/>
+              </a:schemeClr>
+            </a:gs>
+          </a:gsLst>
+          <a:lin ang="5400000" scaled="0"/>
+        </a:gradFill>
+      </a:bgFillStyleLst>
+    </a:fmtScheme>
+  </a:themeElements>
+  <a:objectDefaults/>
+  <a:extraClrSchemeLst/>
+  <a:extLst>
+    <a:ext uri="{05A4C25C-085E-4340-85A3-A5531E510DB2}">
+      <thm15:themeFamily xmlns:thm15="http://schemas.microsoft.com/office/thememl/2012/main" name="Office Theme" id="{62F939B6-93AF-4DB8-9C6B-D6C7DFDC589F}" vid="{4A3C46E8-61CC-4603-A589-7422A47A8E4A}"/>
+    </a:ext>
+  </a:extLst>
+</a:theme>
 </file>